--- a/NetworkAsgn2.pptx
+++ b/NetworkAsgn2.pptx
@@ -7,13 +7,23 @@
   <p:sldIdLst>
     <p:sldId id="256" r:id="rId5"/>
     <p:sldId id="257" r:id="rId6"/>
-    <p:sldId id="258" r:id="rId7"/>
+    <p:sldId id="265" r:id="rId7"/>
     <p:sldId id="259" r:id="rId8"/>
-    <p:sldId id="260" r:id="rId9"/>
-    <p:sldId id="261" r:id="rId10"/>
-    <p:sldId id="262" r:id="rId11"/>
-    <p:sldId id="263" r:id="rId12"/>
-    <p:sldId id="264" r:id="rId13"/>
+    <p:sldId id="266" r:id="rId9"/>
+    <p:sldId id="258" r:id="rId10"/>
+    <p:sldId id="260" r:id="rId11"/>
+    <p:sldId id="267" r:id="rId12"/>
+    <p:sldId id="268" r:id="rId13"/>
+    <p:sldId id="261" r:id="rId14"/>
+    <p:sldId id="271" r:id="rId15"/>
+    <p:sldId id="272" r:id="rId16"/>
+    <p:sldId id="262" r:id="rId17"/>
+    <p:sldId id="269" r:id="rId18"/>
+    <p:sldId id="270" r:id="rId19"/>
+    <p:sldId id="263" r:id="rId20"/>
+    <p:sldId id="273" r:id="rId21"/>
+    <p:sldId id="274" r:id="rId22"/>
+    <p:sldId id="275" r:id="rId23"/>
   </p:sldIdLst>
   <p:sldSz cx="12192000" cy="6858000"/>
   <p:notesSz cx="6858000" cy="9144000"/>
@@ -298,7 +308,7 @@
             <a:fld id="{87DE6118-2437-4B30-8E3C-4D2BE6020583}" type="datetimeFigureOut">
               <a:rPr lang="en-US" dirty="0"/>
               <a:pPr/>
-              <a:t>4/13/2024</a:t>
+              <a:t>4/14/2024</a:t>
             </a:fld>
             <a:endParaRPr lang="en-US" dirty="0"/>
           </a:p>
@@ -624,7 +634,7 @@
           <a:p>
             <a:fld id="{87DE6118-2437-4B30-8E3C-4D2BE6020583}" type="datetimeFigureOut">
               <a:rPr lang="en-US" dirty="0"/>
-              <a:t>4/13/2024</a:t>
+              <a:t>4/14/2024</a:t>
             </a:fld>
             <a:endParaRPr lang="en-US" dirty="0"/>
           </a:p>
@@ -799,7 +809,7 @@
           <a:p>
             <a:fld id="{87DE6118-2437-4B30-8E3C-4D2BE6020583}" type="datetimeFigureOut">
               <a:rPr lang="en-US" dirty="0"/>
-              <a:t>4/13/2024</a:t>
+              <a:t>4/14/2024</a:t>
             </a:fld>
             <a:endParaRPr lang="en-US" dirty="0"/>
           </a:p>
@@ -964,7 +974,7 @@
           <a:p>
             <a:fld id="{87DE6118-2437-4B30-8E3C-4D2BE6020583}" type="datetimeFigureOut">
               <a:rPr lang="en-US" dirty="0"/>
-              <a:t>4/13/2024</a:t>
+              <a:t>4/14/2024</a:t>
             </a:fld>
             <a:endParaRPr lang="en-US" dirty="0"/>
           </a:p>
@@ -1237,7 +1247,7 @@
             <a:fld id="{87DE6118-2437-4B30-8E3C-4D2BE6020583}" type="datetimeFigureOut">
               <a:rPr lang="en-US" dirty="0"/>
               <a:pPr/>
-              <a:t>4/13/2024</a:t>
+              <a:t>4/14/2024</a:t>
             </a:fld>
             <a:endParaRPr lang="en-US" dirty="0"/>
           </a:p>
@@ -1627,7 +1637,7 @@
           <a:p>
             <a:fld id="{87DE6118-2437-4B30-8E3C-4D2BE6020583}" type="datetimeFigureOut">
               <a:rPr lang="en-US" dirty="0"/>
-              <a:t>4/13/2024</a:t>
+              <a:t>4/14/2024</a:t>
             </a:fld>
             <a:endParaRPr lang="en-US" dirty="0"/>
           </a:p>
@@ -2099,7 +2109,7 @@
           <a:p>
             <a:fld id="{87DE6118-2437-4B30-8E3C-4D2BE6020583}" type="datetimeFigureOut">
               <a:rPr lang="en-US" dirty="0"/>
-              <a:t>4/13/2024</a:t>
+              <a:t>4/14/2024</a:t>
             </a:fld>
             <a:endParaRPr lang="en-US" dirty="0"/>
           </a:p>
@@ -2212,7 +2222,7 @@
           <a:p>
             <a:fld id="{87DE6118-2437-4B30-8E3C-4D2BE6020583}" type="datetimeFigureOut">
               <a:rPr lang="en-US" dirty="0"/>
-              <a:t>4/13/2024</a:t>
+              <a:t>4/14/2024</a:t>
             </a:fld>
             <a:endParaRPr lang="en-US" dirty="0"/>
           </a:p>
@@ -2302,7 +2312,7 @@
           <a:p>
             <a:fld id="{87DE6118-2437-4B30-8E3C-4D2BE6020583}" type="datetimeFigureOut">
               <a:rPr lang="en-US" dirty="0"/>
-              <a:t>4/13/2024</a:t>
+              <a:t>4/14/2024</a:t>
             </a:fld>
             <a:endParaRPr lang="en-US" dirty="0"/>
           </a:p>
@@ -2644,7 +2654,7 @@
             <a:fld id="{87DE6118-2437-4B30-8E3C-4D2BE6020583}" type="datetimeFigureOut">
               <a:rPr lang="en-US" dirty="0"/>
               <a:pPr/>
-              <a:t>4/13/2024</a:t>
+              <a:t>4/14/2024</a:t>
             </a:fld>
             <a:endParaRPr lang="en-US" dirty="0"/>
           </a:p>
@@ -3029,7 +3039,7 @@
             <a:fld id="{87DE6118-2437-4B30-8E3C-4D2BE6020583}" type="datetimeFigureOut">
               <a:rPr lang="en-US" dirty="0"/>
               <a:pPr/>
-              <a:t>4/13/2024</a:t>
+              <a:t>4/14/2024</a:t>
             </a:fld>
             <a:endParaRPr lang="en-US" dirty="0"/>
           </a:p>
@@ -3304,7 +3314,7 @@
             <a:fld id="{87DE6118-2437-4B30-8E3C-4D2BE6020583}" type="datetimeFigureOut">
               <a:rPr lang="en-US" dirty="0"/>
               <a:pPr/>
-              <a:t>4/13/2024</a:t>
+              <a:t>4/14/2024</a:t>
             </a:fld>
             <a:endParaRPr lang="en-US" dirty="0"/>
           </a:p>
@@ -3812,6 +3822,36 @@
           <a:chExt cx="0" cy="0"/>
         </a:xfrm>
       </p:grpSpPr>
+      <p:pic>
+        <p:nvPicPr>
+          <p:cNvPr id="4" name="Picture 3">
+            <a:extLst>
+              <a:ext uri="{FF2B5EF4-FFF2-40B4-BE49-F238E27FC236}">
+                <a16:creationId xmlns:a16="http://schemas.microsoft.com/office/drawing/2014/main" id="{48FFF58B-D5E9-4475-A7B6-D176D5EB6F77}"/>
+              </a:ext>
+            </a:extLst>
+          </p:cNvPr>
+          <p:cNvPicPr>
+            <a:picLocks noChangeAspect="1"/>
+          </p:cNvPicPr>
+          <p:nvPr/>
+        </p:nvPicPr>
+        <p:blipFill>
+          <a:blip r:embed="rId2"/>
+          <a:stretch>
+            <a:fillRect/>
+          </a:stretch>
+        </p:blipFill>
+        <p:spPr>
+          <a:xfrm>
+            <a:off x="-250092" y="-416707"/>
+            <a:ext cx="12717863" cy="7576348"/>
+          </a:xfrm>
+          <a:prstGeom prst="rect">
+            <a:avLst/>
+          </a:prstGeom>
+        </p:spPr>
+      </p:pic>
       <p:sp>
         <p:nvSpPr>
           <p:cNvPr id="2" name="Title 1">
@@ -3834,10 +3874,24 @@
           <a:lstStyle/>
           <a:p>
             <a:r>
-              <a:rPr lang="en-US" dirty="0"/>
+              <a:rPr lang="en-US" dirty="0">
+                <a:solidFill>
+                  <a:schemeClr val="accent2">
+                    <a:lumMod val="60000"/>
+                    <a:lumOff val="40000"/>
+                  </a:schemeClr>
+                </a:solidFill>
+              </a:rPr>
               <a:t>Space shooter multiplayer</a:t>
             </a:r>
-            <a:endParaRPr lang="en-CA" dirty="0"/>
+            <a:endParaRPr lang="en-CA" dirty="0">
+              <a:solidFill>
+                <a:schemeClr val="accent2">
+                  <a:lumMod val="60000"/>
+                  <a:lumOff val="40000"/>
+                </a:schemeClr>
+              </a:solidFill>
+            </a:endParaRPr>
           </a:p>
         </p:txBody>
       </p:sp>
@@ -3863,16 +3917,37 @@
           <a:lstStyle/>
           <a:p>
             <a:r>
-              <a:rPr lang="en-US" dirty="0"/>
+              <a:rPr lang="en-US" dirty="0">
+                <a:solidFill>
+                  <a:schemeClr val="accent2">
+                    <a:lumMod val="60000"/>
+                    <a:lumOff val="40000"/>
+                  </a:schemeClr>
+                </a:solidFill>
+              </a:rPr>
               <a:t>Alan</a:t>
             </a:r>
           </a:p>
           <a:p>
             <a:r>
-              <a:rPr lang="en-US" dirty="0"/>
+              <a:rPr lang="en-US" dirty="0">
+                <a:solidFill>
+                  <a:schemeClr val="accent2">
+                    <a:lumMod val="60000"/>
+                    <a:lumOff val="40000"/>
+                  </a:schemeClr>
+                </a:solidFill>
+              </a:rPr>
               <a:t>Sami</a:t>
             </a:r>
-            <a:endParaRPr lang="en-CA" dirty="0"/>
+            <a:endParaRPr lang="en-CA" dirty="0">
+              <a:solidFill>
+                <a:schemeClr val="accent2">
+                  <a:lumMod val="60000"/>
+                  <a:lumOff val="40000"/>
+                </a:schemeClr>
+              </a:solidFill>
+            </a:endParaRPr>
           </a:p>
         </p:txBody>
       </p:sp>
@@ -3880,6 +3955,1073 @@
     <p:extLst>
       <p:ext uri="{BB962C8B-B14F-4D97-AF65-F5344CB8AC3E}">
         <p14:creationId xmlns:p14="http://schemas.microsoft.com/office/powerpoint/2010/main" val="796642189"/>
+      </p:ext>
+    </p:extLst>
+  </p:cSld>
+  <p:clrMapOvr>
+    <a:masterClrMapping/>
+  </p:clrMapOvr>
+</p:sld>
+</file>
+
+<file path=ppt/slides/slide10.xml><?xml version="1.0" encoding="utf-8"?>
+<p:sld xmlns:a="http://schemas.openxmlformats.org/drawingml/2006/main" xmlns:r="http://schemas.openxmlformats.org/officeDocument/2006/relationships" xmlns:p="http://schemas.openxmlformats.org/presentationml/2006/main">
+  <p:cSld>
+    <p:spTree>
+      <p:nvGrpSpPr>
+        <p:cNvPr id="1" name=""/>
+        <p:cNvGrpSpPr/>
+        <p:nvPr/>
+      </p:nvGrpSpPr>
+      <p:grpSpPr>
+        <a:xfrm>
+          <a:off x="0" y="0"/>
+          <a:ext cx="0" cy="0"/>
+          <a:chOff x="0" y="0"/>
+          <a:chExt cx="0" cy="0"/>
+        </a:xfrm>
+      </p:grpSpPr>
+      <p:sp>
+        <p:nvSpPr>
+          <p:cNvPr id="2" name="Title 1">
+            <a:extLst>
+              <a:ext uri="{FF2B5EF4-FFF2-40B4-BE49-F238E27FC236}">
+                <a16:creationId xmlns:a16="http://schemas.microsoft.com/office/drawing/2014/main" id="{9C39D750-5D90-F4ED-6D98-D4F63952A862}"/>
+              </a:ext>
+            </a:extLst>
+          </p:cNvPr>
+          <p:cNvSpPr>
+            <a:spLocks noGrp="1"/>
+          </p:cNvSpPr>
+          <p:nvPr>
+            <p:ph type="title"/>
+          </p:nvPr>
+        </p:nvSpPr>
+        <p:spPr/>
+        <p:txBody>
+          <a:bodyPr/>
+          <a:lstStyle/>
+          <a:p>
+            <a:r>
+              <a:rPr lang="en-US" dirty="0"/>
+              <a:t>Player</a:t>
+            </a:r>
+            <a:endParaRPr lang="en-CA" dirty="0"/>
+          </a:p>
+        </p:txBody>
+      </p:sp>
+      <p:sp>
+        <p:nvSpPr>
+          <p:cNvPr id="3" name="Content Placeholder 2">
+            <a:extLst>
+              <a:ext uri="{FF2B5EF4-FFF2-40B4-BE49-F238E27FC236}">
+                <a16:creationId xmlns:a16="http://schemas.microsoft.com/office/drawing/2014/main" id="{2033ECF1-40A4-200F-A0DC-227779671821}"/>
+              </a:ext>
+            </a:extLst>
+          </p:cNvPr>
+          <p:cNvSpPr>
+            <a:spLocks noGrp="1"/>
+          </p:cNvSpPr>
+          <p:nvPr>
+            <p:ph idx="1"/>
+          </p:nvPr>
+        </p:nvSpPr>
+        <p:spPr>
+          <a:xfrm>
+            <a:off x="1371600" y="2286000"/>
+            <a:ext cx="4610403" cy="3581400"/>
+          </a:xfrm>
+        </p:spPr>
+        <p:txBody>
+          <a:bodyPr/>
+          <a:lstStyle/>
+          <a:p>
+            <a:r>
+              <a:rPr lang="en-US" dirty="0"/>
+              <a:t>Spawned on Server in response to client connection</a:t>
+            </a:r>
+          </a:p>
+          <a:p>
+            <a:r>
+              <a:rPr lang="en-US" dirty="0"/>
+              <a:t>Sends RPCs to Spawn Bullets</a:t>
+            </a:r>
+          </a:p>
+          <a:p>
+            <a:endParaRPr lang="en-CA" dirty="0"/>
+          </a:p>
+        </p:txBody>
+      </p:sp>
+      <p:pic>
+        <p:nvPicPr>
+          <p:cNvPr id="4" name="Picture 3">
+            <a:extLst>
+              <a:ext uri="{FF2B5EF4-FFF2-40B4-BE49-F238E27FC236}">
+                <a16:creationId xmlns:a16="http://schemas.microsoft.com/office/drawing/2014/main" id="{F58CB52D-A391-4771-BBA9-31D15DDA18E5}"/>
+              </a:ext>
+            </a:extLst>
+          </p:cNvPr>
+          <p:cNvPicPr>
+            <a:picLocks noChangeAspect="1"/>
+          </p:cNvPicPr>
+          <p:nvPr/>
+        </p:nvPicPr>
+        <p:blipFill>
+          <a:blip r:embed="rId2"/>
+          <a:stretch>
+            <a:fillRect/>
+          </a:stretch>
+        </p:blipFill>
+        <p:spPr>
+          <a:xfrm>
+            <a:off x="6209999" y="791615"/>
+            <a:ext cx="4610403" cy="5641678"/>
+          </a:xfrm>
+          <a:prstGeom prst="rect">
+            <a:avLst/>
+          </a:prstGeom>
+        </p:spPr>
+      </p:pic>
+    </p:spTree>
+    <p:extLst>
+      <p:ext uri="{BB962C8B-B14F-4D97-AF65-F5344CB8AC3E}">
+        <p14:creationId xmlns:p14="http://schemas.microsoft.com/office/powerpoint/2010/main" val="2083622113"/>
+      </p:ext>
+    </p:extLst>
+  </p:cSld>
+  <p:clrMapOvr>
+    <a:masterClrMapping/>
+  </p:clrMapOvr>
+</p:sld>
+</file>
+
+<file path=ppt/slides/slide11.xml><?xml version="1.0" encoding="utf-8"?>
+<p:sld xmlns:a="http://schemas.openxmlformats.org/drawingml/2006/main" xmlns:r="http://schemas.openxmlformats.org/officeDocument/2006/relationships" xmlns:p="http://schemas.openxmlformats.org/presentationml/2006/main">
+  <p:cSld>
+    <p:spTree>
+      <p:nvGrpSpPr>
+        <p:cNvPr id="1" name=""/>
+        <p:cNvGrpSpPr/>
+        <p:nvPr/>
+      </p:nvGrpSpPr>
+      <p:grpSpPr>
+        <a:xfrm>
+          <a:off x="0" y="0"/>
+          <a:ext cx="0" cy="0"/>
+          <a:chOff x="0" y="0"/>
+          <a:chExt cx="0" cy="0"/>
+        </a:xfrm>
+      </p:grpSpPr>
+      <p:sp>
+        <p:nvSpPr>
+          <p:cNvPr id="2" name="Title 1">
+            <a:extLst>
+              <a:ext uri="{FF2B5EF4-FFF2-40B4-BE49-F238E27FC236}">
+                <a16:creationId xmlns:a16="http://schemas.microsoft.com/office/drawing/2014/main" id="{9C39D750-5D90-F4ED-6D98-D4F63952A862}"/>
+              </a:ext>
+            </a:extLst>
+          </p:cNvPr>
+          <p:cNvSpPr>
+            <a:spLocks noGrp="1"/>
+          </p:cNvSpPr>
+          <p:nvPr>
+            <p:ph type="title"/>
+          </p:nvPr>
+        </p:nvSpPr>
+        <p:spPr/>
+        <p:txBody>
+          <a:bodyPr/>
+          <a:lstStyle/>
+          <a:p>
+            <a:r>
+              <a:rPr lang="en-US" dirty="0"/>
+              <a:t>Player</a:t>
+            </a:r>
+            <a:endParaRPr lang="en-CA" dirty="0"/>
+          </a:p>
+        </p:txBody>
+      </p:sp>
+      <p:pic>
+        <p:nvPicPr>
+          <p:cNvPr id="7" name="Picture 6">
+            <a:extLst>
+              <a:ext uri="{FF2B5EF4-FFF2-40B4-BE49-F238E27FC236}">
+                <a16:creationId xmlns:a16="http://schemas.microsoft.com/office/drawing/2014/main" id="{D3B5FAF2-3CA1-4205-B1EE-CF9619D5C529}"/>
+              </a:ext>
+            </a:extLst>
+          </p:cNvPr>
+          <p:cNvPicPr>
+            <a:picLocks noChangeAspect="1"/>
+          </p:cNvPicPr>
+          <p:nvPr/>
+        </p:nvPicPr>
+        <p:blipFill>
+          <a:blip r:embed="rId2"/>
+          <a:stretch>
+            <a:fillRect/>
+          </a:stretch>
+        </p:blipFill>
+        <p:spPr>
+          <a:xfrm>
+            <a:off x="3899905" y="-52698"/>
+            <a:ext cx="8457195" cy="6963396"/>
+          </a:xfrm>
+          <a:prstGeom prst="rect">
+            <a:avLst/>
+          </a:prstGeom>
+        </p:spPr>
+      </p:pic>
+    </p:spTree>
+    <p:extLst>
+      <p:ext uri="{BB962C8B-B14F-4D97-AF65-F5344CB8AC3E}">
+        <p14:creationId xmlns:p14="http://schemas.microsoft.com/office/powerpoint/2010/main" val="3983040303"/>
+      </p:ext>
+    </p:extLst>
+  </p:cSld>
+  <p:clrMapOvr>
+    <a:masterClrMapping/>
+  </p:clrMapOvr>
+</p:sld>
+</file>
+
+<file path=ppt/slides/slide12.xml><?xml version="1.0" encoding="utf-8"?>
+<p:sld xmlns:a="http://schemas.openxmlformats.org/drawingml/2006/main" xmlns:r="http://schemas.openxmlformats.org/officeDocument/2006/relationships" xmlns:p="http://schemas.openxmlformats.org/presentationml/2006/main">
+  <p:cSld>
+    <p:spTree>
+      <p:nvGrpSpPr>
+        <p:cNvPr id="1" name=""/>
+        <p:cNvGrpSpPr/>
+        <p:nvPr/>
+      </p:nvGrpSpPr>
+      <p:grpSpPr>
+        <a:xfrm>
+          <a:off x="0" y="0"/>
+          <a:ext cx="0" cy="0"/>
+          <a:chOff x="0" y="0"/>
+          <a:chExt cx="0" cy="0"/>
+        </a:xfrm>
+      </p:grpSpPr>
+      <p:sp>
+        <p:nvSpPr>
+          <p:cNvPr id="2" name="Title 1">
+            <a:extLst>
+              <a:ext uri="{FF2B5EF4-FFF2-40B4-BE49-F238E27FC236}">
+                <a16:creationId xmlns:a16="http://schemas.microsoft.com/office/drawing/2014/main" id="{9C39D750-5D90-F4ED-6D98-D4F63952A862}"/>
+              </a:ext>
+            </a:extLst>
+          </p:cNvPr>
+          <p:cNvSpPr>
+            <a:spLocks noGrp="1"/>
+          </p:cNvSpPr>
+          <p:nvPr>
+            <p:ph type="title"/>
+          </p:nvPr>
+        </p:nvSpPr>
+        <p:spPr/>
+        <p:txBody>
+          <a:bodyPr/>
+          <a:lstStyle/>
+          <a:p>
+            <a:r>
+              <a:rPr lang="en-US" dirty="0"/>
+              <a:t>Player</a:t>
+            </a:r>
+            <a:endParaRPr lang="en-CA" dirty="0"/>
+          </a:p>
+        </p:txBody>
+      </p:sp>
+      <p:pic>
+        <p:nvPicPr>
+          <p:cNvPr id="3" name="Picture 2">
+            <a:extLst>
+              <a:ext uri="{FF2B5EF4-FFF2-40B4-BE49-F238E27FC236}">
+                <a16:creationId xmlns:a16="http://schemas.microsoft.com/office/drawing/2014/main" id="{F44420D0-D2FB-471D-80C1-A02417125125}"/>
+              </a:ext>
+            </a:extLst>
+          </p:cNvPr>
+          <p:cNvPicPr>
+            <a:picLocks noChangeAspect="1"/>
+          </p:cNvPicPr>
+          <p:nvPr/>
+        </p:nvPicPr>
+        <p:blipFill>
+          <a:blip r:embed="rId2"/>
+          <a:stretch>
+            <a:fillRect/>
+          </a:stretch>
+        </p:blipFill>
+        <p:spPr>
+          <a:xfrm>
+            <a:off x="3067272" y="0"/>
+            <a:ext cx="11865685" cy="7175500"/>
+          </a:xfrm>
+          <a:prstGeom prst="rect">
+            <a:avLst/>
+          </a:prstGeom>
+        </p:spPr>
+      </p:pic>
+    </p:spTree>
+    <p:extLst>
+      <p:ext uri="{BB962C8B-B14F-4D97-AF65-F5344CB8AC3E}">
+        <p14:creationId xmlns:p14="http://schemas.microsoft.com/office/powerpoint/2010/main" val="2564969199"/>
+      </p:ext>
+    </p:extLst>
+  </p:cSld>
+  <p:clrMapOvr>
+    <a:masterClrMapping/>
+  </p:clrMapOvr>
+</p:sld>
+</file>
+
+<file path=ppt/slides/slide13.xml><?xml version="1.0" encoding="utf-8"?>
+<p:sld xmlns:a="http://schemas.openxmlformats.org/drawingml/2006/main" xmlns:r="http://schemas.openxmlformats.org/officeDocument/2006/relationships" xmlns:p="http://schemas.openxmlformats.org/presentationml/2006/main">
+  <p:cSld>
+    <p:spTree>
+      <p:nvGrpSpPr>
+        <p:cNvPr id="1" name=""/>
+        <p:cNvGrpSpPr/>
+        <p:nvPr/>
+      </p:nvGrpSpPr>
+      <p:grpSpPr>
+        <a:xfrm>
+          <a:off x="0" y="0"/>
+          <a:ext cx="0" cy="0"/>
+          <a:chOff x="0" y="0"/>
+          <a:chExt cx="0" cy="0"/>
+        </a:xfrm>
+      </p:grpSpPr>
+      <p:sp>
+        <p:nvSpPr>
+          <p:cNvPr id="2" name="Title 1">
+            <a:extLst>
+              <a:ext uri="{FF2B5EF4-FFF2-40B4-BE49-F238E27FC236}">
+                <a16:creationId xmlns:a16="http://schemas.microsoft.com/office/drawing/2014/main" id="{71611EB6-F338-090D-106F-204A8835676B}"/>
+              </a:ext>
+            </a:extLst>
+          </p:cNvPr>
+          <p:cNvSpPr>
+            <a:spLocks noGrp="1"/>
+          </p:cNvSpPr>
+          <p:nvPr>
+            <p:ph type="title"/>
+          </p:nvPr>
+        </p:nvSpPr>
+        <p:spPr/>
+        <p:txBody>
+          <a:bodyPr/>
+          <a:lstStyle/>
+          <a:p>
+            <a:r>
+              <a:rPr lang="en-US" dirty="0"/>
+              <a:t>Bullets</a:t>
+            </a:r>
+            <a:endParaRPr lang="en-CA" dirty="0"/>
+          </a:p>
+        </p:txBody>
+      </p:sp>
+      <p:sp>
+        <p:nvSpPr>
+          <p:cNvPr id="3" name="Content Placeholder 2">
+            <a:extLst>
+              <a:ext uri="{FF2B5EF4-FFF2-40B4-BE49-F238E27FC236}">
+                <a16:creationId xmlns:a16="http://schemas.microsoft.com/office/drawing/2014/main" id="{D3878A3F-7193-7BA6-8935-811550E1FCE5}"/>
+              </a:ext>
+            </a:extLst>
+          </p:cNvPr>
+          <p:cNvSpPr>
+            <a:spLocks noGrp="1"/>
+          </p:cNvSpPr>
+          <p:nvPr>
+            <p:ph idx="1"/>
+          </p:nvPr>
+        </p:nvSpPr>
+        <p:spPr>
+          <a:xfrm>
+            <a:off x="1371600" y="2286000"/>
+            <a:ext cx="5994400" cy="3581400"/>
+          </a:xfrm>
+        </p:spPr>
+        <p:txBody>
+          <a:bodyPr/>
+          <a:lstStyle/>
+          <a:p>
+            <a:r>
+              <a:rPr lang="en-US" dirty="0"/>
+              <a:t>Simple Entities spawned on Server and Replicated across the network</a:t>
+            </a:r>
+          </a:p>
+          <a:p>
+            <a:r>
+              <a:rPr lang="en-US" dirty="0"/>
+              <a:t>Uses RPCs for movement</a:t>
+            </a:r>
+          </a:p>
+          <a:p>
+            <a:r>
+              <a:rPr lang="en-US" dirty="0"/>
+              <a:t>Uses prediction for smooth movement</a:t>
+            </a:r>
+            <a:endParaRPr lang="en-CA" dirty="0"/>
+          </a:p>
+        </p:txBody>
+      </p:sp>
+      <p:pic>
+        <p:nvPicPr>
+          <p:cNvPr id="4" name="Picture 3">
+            <a:extLst>
+              <a:ext uri="{FF2B5EF4-FFF2-40B4-BE49-F238E27FC236}">
+                <a16:creationId xmlns:a16="http://schemas.microsoft.com/office/drawing/2014/main" id="{261A1DBE-4898-4F59-A103-683EEB466E57}"/>
+              </a:ext>
+            </a:extLst>
+          </p:cNvPr>
+          <p:cNvPicPr>
+            <a:picLocks noChangeAspect="1"/>
+          </p:cNvPicPr>
+          <p:nvPr/>
+        </p:nvPicPr>
+        <p:blipFill>
+          <a:blip r:embed="rId2"/>
+          <a:stretch>
+            <a:fillRect/>
+          </a:stretch>
+        </p:blipFill>
+        <p:spPr>
+          <a:xfrm>
+            <a:off x="7366000" y="990600"/>
+            <a:ext cx="4382112" cy="5325218"/>
+          </a:xfrm>
+          <a:prstGeom prst="rect">
+            <a:avLst/>
+          </a:prstGeom>
+        </p:spPr>
+      </p:pic>
+    </p:spTree>
+    <p:extLst>
+      <p:ext uri="{BB962C8B-B14F-4D97-AF65-F5344CB8AC3E}">
+        <p14:creationId xmlns:p14="http://schemas.microsoft.com/office/powerpoint/2010/main" val="3817045069"/>
+      </p:ext>
+    </p:extLst>
+  </p:cSld>
+  <p:clrMapOvr>
+    <a:masterClrMapping/>
+  </p:clrMapOvr>
+</p:sld>
+</file>
+
+<file path=ppt/slides/slide14.xml><?xml version="1.0" encoding="utf-8"?>
+<p:sld xmlns:a="http://schemas.openxmlformats.org/drawingml/2006/main" xmlns:r="http://schemas.openxmlformats.org/officeDocument/2006/relationships" xmlns:p="http://schemas.openxmlformats.org/presentationml/2006/main">
+  <p:cSld>
+    <p:spTree>
+      <p:nvGrpSpPr>
+        <p:cNvPr id="1" name=""/>
+        <p:cNvGrpSpPr/>
+        <p:nvPr/>
+      </p:nvGrpSpPr>
+      <p:grpSpPr>
+        <a:xfrm>
+          <a:off x="0" y="0"/>
+          <a:ext cx="0" cy="0"/>
+          <a:chOff x="0" y="0"/>
+          <a:chExt cx="0" cy="0"/>
+        </a:xfrm>
+      </p:grpSpPr>
+      <p:sp>
+        <p:nvSpPr>
+          <p:cNvPr id="2" name="Title 1">
+            <a:extLst>
+              <a:ext uri="{FF2B5EF4-FFF2-40B4-BE49-F238E27FC236}">
+                <a16:creationId xmlns:a16="http://schemas.microsoft.com/office/drawing/2014/main" id="{71611EB6-F338-090D-106F-204A8835676B}"/>
+              </a:ext>
+            </a:extLst>
+          </p:cNvPr>
+          <p:cNvSpPr>
+            <a:spLocks noGrp="1"/>
+          </p:cNvSpPr>
+          <p:nvPr>
+            <p:ph type="title"/>
+          </p:nvPr>
+        </p:nvSpPr>
+        <p:spPr/>
+        <p:txBody>
+          <a:bodyPr/>
+          <a:lstStyle/>
+          <a:p>
+            <a:r>
+              <a:rPr lang="en-US" dirty="0"/>
+              <a:t>Bullets</a:t>
+            </a:r>
+            <a:endParaRPr lang="en-CA" dirty="0"/>
+          </a:p>
+        </p:txBody>
+      </p:sp>
+      <p:pic>
+        <p:nvPicPr>
+          <p:cNvPr id="9" name="Picture 8">
+            <a:extLst>
+              <a:ext uri="{FF2B5EF4-FFF2-40B4-BE49-F238E27FC236}">
+                <a16:creationId xmlns:a16="http://schemas.microsoft.com/office/drawing/2014/main" id="{13ED7858-8044-4E02-A3E2-CD068F2249DC}"/>
+              </a:ext>
+            </a:extLst>
+          </p:cNvPr>
+          <p:cNvPicPr>
+            <a:picLocks noChangeAspect="1"/>
+          </p:cNvPicPr>
+          <p:nvPr/>
+        </p:nvPicPr>
+        <p:blipFill>
+          <a:blip r:embed="rId2"/>
+          <a:stretch>
+            <a:fillRect/>
+          </a:stretch>
+        </p:blipFill>
+        <p:spPr>
+          <a:xfrm>
+            <a:off x="3708400" y="0"/>
+            <a:ext cx="9279466" cy="6959600"/>
+          </a:xfrm>
+          <a:prstGeom prst="rect">
+            <a:avLst/>
+          </a:prstGeom>
+        </p:spPr>
+      </p:pic>
+    </p:spTree>
+    <p:extLst>
+      <p:ext uri="{BB962C8B-B14F-4D97-AF65-F5344CB8AC3E}">
+        <p14:creationId xmlns:p14="http://schemas.microsoft.com/office/powerpoint/2010/main" val="2401009957"/>
+      </p:ext>
+    </p:extLst>
+  </p:cSld>
+  <p:clrMapOvr>
+    <a:masterClrMapping/>
+  </p:clrMapOvr>
+</p:sld>
+</file>
+
+<file path=ppt/slides/slide15.xml><?xml version="1.0" encoding="utf-8"?>
+<p:sld xmlns:a="http://schemas.openxmlformats.org/drawingml/2006/main" xmlns:r="http://schemas.openxmlformats.org/officeDocument/2006/relationships" xmlns:p="http://schemas.openxmlformats.org/presentationml/2006/main">
+  <p:cSld>
+    <p:spTree>
+      <p:nvGrpSpPr>
+        <p:cNvPr id="1" name=""/>
+        <p:cNvGrpSpPr/>
+        <p:nvPr/>
+      </p:nvGrpSpPr>
+      <p:grpSpPr>
+        <a:xfrm>
+          <a:off x="0" y="0"/>
+          <a:ext cx="0" cy="0"/>
+          <a:chOff x="0" y="0"/>
+          <a:chExt cx="0" cy="0"/>
+        </a:xfrm>
+      </p:grpSpPr>
+      <p:sp>
+        <p:nvSpPr>
+          <p:cNvPr id="2" name="Title 1">
+            <a:extLst>
+              <a:ext uri="{FF2B5EF4-FFF2-40B4-BE49-F238E27FC236}">
+                <a16:creationId xmlns:a16="http://schemas.microsoft.com/office/drawing/2014/main" id="{71611EB6-F338-090D-106F-204A8835676B}"/>
+              </a:ext>
+            </a:extLst>
+          </p:cNvPr>
+          <p:cNvSpPr>
+            <a:spLocks noGrp="1"/>
+          </p:cNvSpPr>
+          <p:nvPr>
+            <p:ph type="title"/>
+          </p:nvPr>
+        </p:nvSpPr>
+        <p:spPr>
+          <a:xfrm>
+            <a:off x="1371600" y="685800"/>
+            <a:ext cx="1968500" cy="1485900"/>
+          </a:xfrm>
+        </p:spPr>
+        <p:txBody>
+          <a:bodyPr/>
+          <a:lstStyle/>
+          <a:p>
+            <a:r>
+              <a:rPr lang="en-US" dirty="0"/>
+              <a:t>Bullets</a:t>
+            </a:r>
+            <a:endParaRPr lang="en-CA" dirty="0"/>
+          </a:p>
+        </p:txBody>
+      </p:sp>
+      <p:pic>
+        <p:nvPicPr>
+          <p:cNvPr id="3" name="Picture 2">
+            <a:extLst>
+              <a:ext uri="{FF2B5EF4-FFF2-40B4-BE49-F238E27FC236}">
+                <a16:creationId xmlns:a16="http://schemas.microsoft.com/office/drawing/2014/main" id="{95C0306D-56C9-455C-BDC4-9DBB84ECC8BD}"/>
+              </a:ext>
+            </a:extLst>
+          </p:cNvPr>
+          <p:cNvPicPr>
+            <a:picLocks noChangeAspect="1"/>
+          </p:cNvPicPr>
+          <p:nvPr/>
+        </p:nvPicPr>
+        <p:blipFill>
+          <a:blip r:embed="rId2"/>
+          <a:stretch>
+            <a:fillRect/>
+          </a:stretch>
+        </p:blipFill>
+        <p:spPr>
+          <a:xfrm>
+            <a:off x="3175000" y="1530171"/>
+            <a:ext cx="13465940" cy="5327829"/>
+          </a:xfrm>
+          <a:prstGeom prst="rect">
+            <a:avLst/>
+          </a:prstGeom>
+        </p:spPr>
+      </p:pic>
+    </p:spTree>
+    <p:extLst>
+      <p:ext uri="{BB962C8B-B14F-4D97-AF65-F5344CB8AC3E}">
+        <p14:creationId xmlns:p14="http://schemas.microsoft.com/office/powerpoint/2010/main" val="4187461867"/>
+      </p:ext>
+    </p:extLst>
+  </p:cSld>
+  <p:clrMapOvr>
+    <a:masterClrMapping/>
+  </p:clrMapOvr>
+</p:sld>
+</file>
+
+<file path=ppt/slides/slide16.xml><?xml version="1.0" encoding="utf-8"?>
+<p:sld xmlns:a="http://schemas.openxmlformats.org/drawingml/2006/main" xmlns:r="http://schemas.openxmlformats.org/officeDocument/2006/relationships" xmlns:p="http://schemas.openxmlformats.org/presentationml/2006/main">
+  <p:cSld>
+    <p:spTree>
+      <p:nvGrpSpPr>
+        <p:cNvPr id="1" name=""/>
+        <p:cNvGrpSpPr/>
+        <p:nvPr/>
+      </p:nvGrpSpPr>
+      <p:grpSpPr>
+        <a:xfrm>
+          <a:off x="0" y="0"/>
+          <a:ext cx="0" cy="0"/>
+          <a:chOff x="0" y="0"/>
+          <a:chExt cx="0" cy="0"/>
+        </a:xfrm>
+      </p:grpSpPr>
+      <p:sp>
+        <p:nvSpPr>
+          <p:cNvPr id="2" name="Title 1">
+            <a:extLst>
+              <a:ext uri="{FF2B5EF4-FFF2-40B4-BE49-F238E27FC236}">
+                <a16:creationId xmlns:a16="http://schemas.microsoft.com/office/drawing/2014/main" id="{4CD0E974-F2BB-1E2A-D46E-1613EFB342D4}"/>
+              </a:ext>
+            </a:extLst>
+          </p:cNvPr>
+          <p:cNvSpPr>
+            <a:spLocks noGrp="1"/>
+          </p:cNvSpPr>
+          <p:nvPr>
+            <p:ph type="title"/>
+          </p:nvPr>
+        </p:nvSpPr>
+        <p:spPr/>
+        <p:txBody>
+          <a:bodyPr/>
+          <a:lstStyle/>
+          <a:p>
+            <a:r>
+              <a:rPr lang="en-US" dirty="0"/>
+              <a:t>Asteroids &amp; Spawning</a:t>
+            </a:r>
+            <a:endParaRPr lang="en-CA" dirty="0"/>
+          </a:p>
+        </p:txBody>
+      </p:sp>
+      <p:sp>
+        <p:nvSpPr>
+          <p:cNvPr id="3" name="Content Placeholder 2">
+            <a:extLst>
+              <a:ext uri="{FF2B5EF4-FFF2-40B4-BE49-F238E27FC236}">
+                <a16:creationId xmlns:a16="http://schemas.microsoft.com/office/drawing/2014/main" id="{889EBC58-8EAB-950E-18EC-DFC6B6F08CA4}"/>
+              </a:ext>
+            </a:extLst>
+          </p:cNvPr>
+          <p:cNvSpPr>
+            <a:spLocks noGrp="1"/>
+          </p:cNvSpPr>
+          <p:nvPr>
+            <p:ph idx="1"/>
+          </p:nvPr>
+        </p:nvSpPr>
+        <p:spPr>
+          <a:xfrm>
+            <a:off x="3465052" y="1911765"/>
+            <a:ext cx="6223000" cy="3581400"/>
+          </a:xfrm>
+        </p:spPr>
+        <p:txBody>
+          <a:bodyPr/>
+          <a:lstStyle/>
+          <a:p>
+            <a:r>
+              <a:rPr lang="en-US" dirty="0"/>
+              <a:t>Asteroid Spawner relies on Game Handler for Game State and accordingly spawn asteroids</a:t>
+            </a:r>
+          </a:p>
+          <a:p>
+            <a:r>
+              <a:rPr lang="en-US" dirty="0"/>
+              <a:t>Uses RPCs for spawning</a:t>
+            </a:r>
+          </a:p>
+          <a:p>
+            <a:r>
+              <a:rPr lang="en-US" dirty="0"/>
+              <a:t>Asteroids are like projectiles in terms of functioning</a:t>
+            </a:r>
+            <a:endParaRPr lang="en-CA" dirty="0"/>
+          </a:p>
+        </p:txBody>
+      </p:sp>
+      <p:pic>
+        <p:nvPicPr>
+          <p:cNvPr id="4" name="Picture 3">
+            <a:extLst>
+              <a:ext uri="{FF2B5EF4-FFF2-40B4-BE49-F238E27FC236}">
+                <a16:creationId xmlns:a16="http://schemas.microsoft.com/office/drawing/2014/main" id="{FCBC8D94-BB3E-40B5-A8DD-DB6BEA8ADFCD}"/>
+              </a:ext>
+            </a:extLst>
+          </p:cNvPr>
+          <p:cNvPicPr>
+            <a:picLocks noChangeAspect="1"/>
+          </p:cNvPicPr>
+          <p:nvPr/>
+        </p:nvPicPr>
+        <p:blipFill>
+          <a:blip r:embed="rId2"/>
+          <a:stretch>
+            <a:fillRect/>
+          </a:stretch>
+        </p:blipFill>
+        <p:spPr>
+          <a:xfrm>
+            <a:off x="2871867" y="3702465"/>
+            <a:ext cx="2743583" cy="2800741"/>
+          </a:xfrm>
+          <a:prstGeom prst="rect">
+            <a:avLst/>
+          </a:prstGeom>
+        </p:spPr>
+      </p:pic>
+      <p:pic>
+        <p:nvPicPr>
+          <p:cNvPr id="5" name="Picture 4">
+            <a:extLst>
+              <a:ext uri="{FF2B5EF4-FFF2-40B4-BE49-F238E27FC236}">
+                <a16:creationId xmlns:a16="http://schemas.microsoft.com/office/drawing/2014/main" id="{9C0BDA5D-C0C3-4124-A640-82B3C32198FE}"/>
+              </a:ext>
+            </a:extLst>
+          </p:cNvPr>
+          <p:cNvPicPr>
+            <a:picLocks noChangeAspect="1"/>
+          </p:cNvPicPr>
+          <p:nvPr/>
+        </p:nvPicPr>
+        <p:blipFill>
+          <a:blip r:embed="rId3"/>
+          <a:stretch>
+            <a:fillRect/>
+          </a:stretch>
+        </p:blipFill>
+        <p:spPr>
+          <a:xfrm>
+            <a:off x="7708902" y="3678845"/>
+            <a:ext cx="2013537" cy="3031430"/>
+          </a:xfrm>
+          <a:prstGeom prst="rect">
+            <a:avLst/>
+          </a:prstGeom>
+        </p:spPr>
+      </p:pic>
+    </p:spTree>
+    <p:extLst>
+      <p:ext uri="{BB962C8B-B14F-4D97-AF65-F5344CB8AC3E}">
+        <p14:creationId xmlns:p14="http://schemas.microsoft.com/office/powerpoint/2010/main" val="3303553891"/>
+      </p:ext>
+    </p:extLst>
+  </p:cSld>
+  <p:clrMapOvr>
+    <a:masterClrMapping/>
+  </p:clrMapOvr>
+</p:sld>
+</file>
+
+<file path=ppt/slides/slide17.xml><?xml version="1.0" encoding="utf-8"?>
+<p:sld xmlns:a="http://schemas.openxmlformats.org/drawingml/2006/main" xmlns:r="http://schemas.openxmlformats.org/officeDocument/2006/relationships" xmlns:p="http://schemas.openxmlformats.org/presentationml/2006/main">
+  <p:cSld>
+    <p:spTree>
+      <p:nvGrpSpPr>
+        <p:cNvPr id="1" name=""/>
+        <p:cNvGrpSpPr/>
+        <p:nvPr/>
+      </p:nvGrpSpPr>
+      <p:grpSpPr>
+        <a:xfrm>
+          <a:off x="0" y="0"/>
+          <a:ext cx="0" cy="0"/>
+          <a:chOff x="0" y="0"/>
+          <a:chExt cx="0" cy="0"/>
+        </a:xfrm>
+      </p:grpSpPr>
+      <p:sp>
+        <p:nvSpPr>
+          <p:cNvPr id="2" name="Title 1">
+            <a:extLst>
+              <a:ext uri="{FF2B5EF4-FFF2-40B4-BE49-F238E27FC236}">
+                <a16:creationId xmlns:a16="http://schemas.microsoft.com/office/drawing/2014/main" id="{4CD0E974-F2BB-1E2A-D46E-1613EFB342D4}"/>
+              </a:ext>
+            </a:extLst>
+          </p:cNvPr>
+          <p:cNvSpPr>
+            <a:spLocks noGrp="1"/>
+          </p:cNvSpPr>
+          <p:nvPr>
+            <p:ph type="title"/>
+          </p:nvPr>
+        </p:nvSpPr>
+        <p:spPr>
+          <a:xfrm>
+            <a:off x="939800" y="723900"/>
+            <a:ext cx="2540000" cy="965200"/>
+          </a:xfrm>
+        </p:spPr>
+        <p:txBody>
+          <a:bodyPr>
+            <a:normAutofit fontScale="90000"/>
+          </a:bodyPr>
+          <a:lstStyle/>
+          <a:p>
+            <a:r>
+              <a:rPr lang="en-US" dirty="0"/>
+              <a:t>Spawning</a:t>
+            </a:r>
+            <a:br>
+              <a:rPr lang="en-US" dirty="0"/>
+            </a:br>
+            <a:endParaRPr lang="en-CA" dirty="0"/>
+          </a:p>
+        </p:txBody>
+      </p:sp>
+      <p:pic>
+        <p:nvPicPr>
+          <p:cNvPr id="8" name="Picture 7">
+            <a:extLst>
+              <a:ext uri="{FF2B5EF4-FFF2-40B4-BE49-F238E27FC236}">
+                <a16:creationId xmlns:a16="http://schemas.microsoft.com/office/drawing/2014/main" id="{0B280998-28A4-444F-A9C9-36B2BDFFF3FB}"/>
+              </a:ext>
+            </a:extLst>
+          </p:cNvPr>
+          <p:cNvPicPr>
+            <a:picLocks noChangeAspect="1"/>
+          </p:cNvPicPr>
+          <p:nvPr/>
+        </p:nvPicPr>
+        <p:blipFill>
+          <a:blip r:embed="rId2"/>
+          <a:stretch>
+            <a:fillRect/>
+          </a:stretch>
+        </p:blipFill>
+        <p:spPr>
+          <a:xfrm>
+            <a:off x="4108506" y="0"/>
+            <a:ext cx="9740787" cy="6858000"/>
+          </a:xfrm>
+          <a:prstGeom prst="rect">
+            <a:avLst/>
+          </a:prstGeom>
+        </p:spPr>
+      </p:pic>
+    </p:spTree>
+    <p:extLst>
+      <p:ext uri="{BB962C8B-B14F-4D97-AF65-F5344CB8AC3E}">
+        <p14:creationId xmlns:p14="http://schemas.microsoft.com/office/powerpoint/2010/main" val="3670831650"/>
+      </p:ext>
+    </p:extLst>
+  </p:cSld>
+  <p:clrMapOvr>
+    <a:masterClrMapping/>
+  </p:clrMapOvr>
+</p:sld>
+</file>
+
+<file path=ppt/slides/slide18.xml><?xml version="1.0" encoding="utf-8"?>
+<p:sld xmlns:a="http://schemas.openxmlformats.org/drawingml/2006/main" xmlns:r="http://schemas.openxmlformats.org/officeDocument/2006/relationships" xmlns:p="http://schemas.openxmlformats.org/presentationml/2006/main">
+  <p:cSld>
+    <p:spTree>
+      <p:nvGrpSpPr>
+        <p:cNvPr id="1" name=""/>
+        <p:cNvGrpSpPr/>
+        <p:nvPr/>
+      </p:nvGrpSpPr>
+      <p:grpSpPr>
+        <a:xfrm>
+          <a:off x="0" y="0"/>
+          <a:ext cx="0" cy="0"/>
+          <a:chOff x="0" y="0"/>
+          <a:chExt cx="0" cy="0"/>
+        </a:xfrm>
+      </p:grpSpPr>
+      <p:sp>
+        <p:nvSpPr>
+          <p:cNvPr id="2" name="Title 1">
+            <a:extLst>
+              <a:ext uri="{FF2B5EF4-FFF2-40B4-BE49-F238E27FC236}">
+                <a16:creationId xmlns:a16="http://schemas.microsoft.com/office/drawing/2014/main" id="{4CD0E974-F2BB-1E2A-D46E-1613EFB342D4}"/>
+              </a:ext>
+            </a:extLst>
+          </p:cNvPr>
+          <p:cNvSpPr>
+            <a:spLocks noGrp="1"/>
+          </p:cNvSpPr>
+          <p:nvPr>
+            <p:ph type="title"/>
+          </p:nvPr>
+        </p:nvSpPr>
+        <p:spPr/>
+        <p:txBody>
+          <a:bodyPr/>
+          <a:lstStyle/>
+          <a:p>
+            <a:r>
+              <a:rPr lang="en-CA" dirty="0"/>
+              <a:t>Asteroids</a:t>
+            </a:r>
+          </a:p>
+        </p:txBody>
+      </p:sp>
+      <p:pic>
+        <p:nvPicPr>
+          <p:cNvPr id="8" name="Picture 7">
+            <a:extLst>
+              <a:ext uri="{FF2B5EF4-FFF2-40B4-BE49-F238E27FC236}">
+                <a16:creationId xmlns:a16="http://schemas.microsoft.com/office/drawing/2014/main" id="{6F822DA4-7418-40F8-9FEE-02433D444A5A}"/>
+              </a:ext>
+            </a:extLst>
+          </p:cNvPr>
+          <p:cNvPicPr>
+            <a:picLocks noChangeAspect="1"/>
+          </p:cNvPicPr>
+          <p:nvPr/>
+        </p:nvPicPr>
+        <p:blipFill>
+          <a:blip r:embed="rId2"/>
+          <a:stretch>
+            <a:fillRect/>
+          </a:stretch>
+        </p:blipFill>
+        <p:spPr>
+          <a:xfrm>
+            <a:off x="4018821" y="0"/>
+            <a:ext cx="8446958" cy="6858000"/>
+          </a:xfrm>
+          <a:prstGeom prst="rect">
+            <a:avLst/>
+          </a:prstGeom>
+        </p:spPr>
+      </p:pic>
+    </p:spTree>
+    <p:extLst>
+      <p:ext uri="{BB962C8B-B14F-4D97-AF65-F5344CB8AC3E}">
+        <p14:creationId xmlns:p14="http://schemas.microsoft.com/office/powerpoint/2010/main" val="3297522669"/>
+      </p:ext>
+    </p:extLst>
+  </p:cSld>
+  <p:clrMapOvr>
+    <a:masterClrMapping/>
+  </p:clrMapOvr>
+</p:sld>
+</file>
+
+<file path=ppt/slides/slide19.xml><?xml version="1.0" encoding="utf-8"?>
+<p:sld xmlns:a="http://schemas.openxmlformats.org/drawingml/2006/main" xmlns:r="http://schemas.openxmlformats.org/officeDocument/2006/relationships" xmlns:p="http://schemas.openxmlformats.org/presentationml/2006/main">
+  <p:cSld>
+    <p:spTree>
+      <p:nvGrpSpPr>
+        <p:cNvPr id="1" name=""/>
+        <p:cNvGrpSpPr/>
+        <p:nvPr/>
+      </p:nvGrpSpPr>
+      <p:grpSpPr>
+        <a:xfrm>
+          <a:off x="0" y="0"/>
+          <a:ext cx="0" cy="0"/>
+          <a:chOff x="0" y="0"/>
+          <a:chExt cx="0" cy="0"/>
+        </a:xfrm>
+      </p:grpSpPr>
+      <p:sp>
+        <p:nvSpPr>
+          <p:cNvPr id="2" name="Title 1">
+            <a:extLst>
+              <a:ext uri="{FF2B5EF4-FFF2-40B4-BE49-F238E27FC236}">
+                <a16:creationId xmlns:a16="http://schemas.microsoft.com/office/drawing/2014/main" id="{4CD0E974-F2BB-1E2A-D46E-1613EFB342D4}"/>
+              </a:ext>
+            </a:extLst>
+          </p:cNvPr>
+          <p:cNvSpPr>
+            <a:spLocks noGrp="1"/>
+          </p:cNvSpPr>
+          <p:nvPr>
+            <p:ph type="title"/>
+          </p:nvPr>
+        </p:nvSpPr>
+        <p:spPr/>
+        <p:txBody>
+          <a:bodyPr/>
+          <a:lstStyle/>
+          <a:p>
+            <a:r>
+              <a:rPr lang="en-CA" dirty="0"/>
+              <a:t>Asteroids</a:t>
+            </a:r>
+          </a:p>
+        </p:txBody>
+      </p:sp>
+      <p:pic>
+        <p:nvPicPr>
+          <p:cNvPr id="3" name="Picture 2">
+            <a:extLst>
+              <a:ext uri="{FF2B5EF4-FFF2-40B4-BE49-F238E27FC236}">
+                <a16:creationId xmlns:a16="http://schemas.microsoft.com/office/drawing/2014/main" id="{512602E7-9768-4B39-8E9C-D5A07680574D}"/>
+              </a:ext>
+            </a:extLst>
+          </p:cNvPr>
+          <p:cNvPicPr>
+            <a:picLocks noChangeAspect="1"/>
+          </p:cNvPicPr>
+          <p:nvPr/>
+        </p:nvPicPr>
+        <p:blipFill>
+          <a:blip r:embed="rId2"/>
+          <a:stretch>
+            <a:fillRect/>
+          </a:stretch>
+        </p:blipFill>
+        <p:spPr>
+          <a:xfrm>
+            <a:off x="4013009" y="0"/>
+            <a:ext cx="9169782" cy="6858000"/>
+          </a:xfrm>
+          <a:prstGeom prst="rect">
+            <a:avLst/>
+          </a:prstGeom>
+        </p:spPr>
+      </p:pic>
+    </p:spTree>
+    <p:extLst>
+      <p:ext uri="{BB962C8B-B14F-4D97-AF65-F5344CB8AC3E}">
+        <p14:creationId xmlns:p14="http://schemas.microsoft.com/office/powerpoint/2010/main" val="1732074395"/>
       </p:ext>
     </p:extLst>
   </p:cSld>
@@ -3970,6 +5112,12 @@
           <a:p>
             <a:r>
               <a:rPr lang="en-US" dirty="0"/>
+              <a:t>Multiplayer Network Handling</a:t>
+            </a:r>
+          </a:p>
+          <a:p>
+            <a:r>
+              <a:rPr lang="en-US" dirty="0"/>
               <a:t>Game Handler</a:t>
             </a:r>
           </a:p>
@@ -3982,7 +5130,7 @@
           <a:p>
             <a:r>
               <a:rPr lang="en-US" dirty="0"/>
-              <a:t>Projectiles</a:t>
+              <a:t>Bullets</a:t>
             </a:r>
           </a:p>
           <a:p>
@@ -3991,15 +5139,38 @@
               <a:t>Asteroids &amp; Spawning</a:t>
             </a:r>
           </a:p>
-          <a:p>
-            <a:r>
-              <a:rPr lang="en-US" dirty="0"/>
-              <a:t>Interpolation /  Client-Side Prediction</a:t>
-            </a:r>
-            <a:endParaRPr lang="en-CA" dirty="0"/>
-          </a:p>
-        </p:txBody>
-      </p:sp>
+        </p:txBody>
+      </p:sp>
+      <p:pic>
+        <p:nvPicPr>
+          <p:cNvPr id="6" name="Picture 5">
+            <a:extLst>
+              <a:ext uri="{FF2B5EF4-FFF2-40B4-BE49-F238E27FC236}">
+                <a16:creationId xmlns:a16="http://schemas.microsoft.com/office/drawing/2014/main" id="{4FDE283F-8C38-4756-95D7-C90AB15632E1}"/>
+              </a:ext>
+            </a:extLst>
+          </p:cNvPr>
+          <p:cNvPicPr>
+            <a:picLocks noChangeAspect="1"/>
+          </p:cNvPicPr>
+          <p:nvPr/>
+        </p:nvPicPr>
+        <p:blipFill>
+          <a:blip r:embed="rId2"/>
+          <a:stretch>
+            <a:fillRect/>
+          </a:stretch>
+        </p:blipFill>
+        <p:spPr>
+          <a:xfrm>
+            <a:off x="1371600" y="1863519"/>
+            <a:ext cx="365331" cy="365331"/>
+          </a:xfrm>
+          <a:prstGeom prst="rect">
+            <a:avLst/>
+          </a:prstGeom>
+        </p:spPr>
+      </p:pic>
     </p:spTree>
     <p:extLst>
       <p:ext uri="{BB962C8B-B14F-4D97-AF65-F5344CB8AC3E}">
@@ -4030,6 +5201,36 @@
           <a:chExt cx="0" cy="0"/>
         </a:xfrm>
       </p:grpSpPr>
+      <p:pic>
+        <p:nvPicPr>
+          <p:cNvPr id="10" name="Picture 9">
+            <a:extLst>
+              <a:ext uri="{FF2B5EF4-FFF2-40B4-BE49-F238E27FC236}">
+                <a16:creationId xmlns:a16="http://schemas.microsoft.com/office/drawing/2014/main" id="{3FEDAC17-5EB7-407E-ADEF-D58EB13D6B50}"/>
+              </a:ext>
+            </a:extLst>
+          </p:cNvPr>
+          <p:cNvPicPr>
+            <a:picLocks noChangeAspect="1"/>
+          </p:cNvPicPr>
+          <p:nvPr/>
+        </p:nvPicPr>
+        <p:blipFill>
+          <a:blip r:embed="rId2"/>
+          <a:stretch>
+            <a:fillRect/>
+          </a:stretch>
+        </p:blipFill>
+        <p:spPr>
+          <a:xfrm>
+            <a:off x="7209342" y="4014819"/>
+            <a:ext cx="616719" cy="616719"/>
+          </a:xfrm>
+          <a:prstGeom prst="rect">
+            <a:avLst/>
+          </a:prstGeom>
+        </p:spPr>
+      </p:pic>
       <p:sp>
         <p:nvSpPr>
           <p:cNvPr id="2" name="Title 1">
@@ -4296,6 +5497,7 @@
             </a:extLst>
           </p:cNvPr>
           <p:cNvCxnSpPr>
+            <a:cxnSpLocks/>
             <a:stCxn id="5" idx="3"/>
             <a:endCxn id="9" idx="1"/>
           </p:cNvCxnSpPr>
@@ -4661,10 +5863,70 @@
           </a:fontRef>
         </p:style>
       </p:cxnSp>
+      <p:pic>
+        <p:nvPicPr>
+          <p:cNvPr id="14" name="Picture 13">
+            <a:extLst>
+              <a:ext uri="{FF2B5EF4-FFF2-40B4-BE49-F238E27FC236}">
+                <a16:creationId xmlns:a16="http://schemas.microsoft.com/office/drawing/2014/main" id="{E6108530-D9E6-4A9A-BC05-0D550ED1E245}"/>
+              </a:ext>
+            </a:extLst>
+          </p:cNvPr>
+          <p:cNvPicPr>
+            <a:picLocks noChangeAspect="1"/>
+          </p:cNvPicPr>
+          <p:nvPr/>
+        </p:nvPicPr>
+        <p:blipFill>
+          <a:blip r:embed="rId3"/>
+          <a:stretch>
+            <a:fillRect/>
+          </a:stretch>
+        </p:blipFill>
+        <p:spPr>
+          <a:xfrm>
+            <a:off x="6221032" y="2139305"/>
+            <a:ext cx="460674" cy="460674"/>
+          </a:xfrm>
+          <a:prstGeom prst="rect">
+            <a:avLst/>
+          </a:prstGeom>
+        </p:spPr>
+      </p:pic>
+      <p:pic>
+        <p:nvPicPr>
+          <p:cNvPr id="19" name="Picture 18">
+            <a:extLst>
+              <a:ext uri="{FF2B5EF4-FFF2-40B4-BE49-F238E27FC236}">
+                <a16:creationId xmlns:a16="http://schemas.microsoft.com/office/drawing/2014/main" id="{8DBA1DE3-C795-40AE-A2E4-7BF39F83837D}"/>
+              </a:ext>
+            </a:extLst>
+          </p:cNvPr>
+          <p:cNvPicPr>
+            <a:picLocks noChangeAspect="1"/>
+          </p:cNvPicPr>
+          <p:nvPr/>
+        </p:nvPicPr>
+        <p:blipFill>
+          <a:blip r:embed="rId4"/>
+          <a:stretch>
+            <a:fillRect/>
+          </a:stretch>
+        </p:blipFill>
+        <p:spPr>
+          <a:xfrm>
+            <a:off x="8984880" y="2353828"/>
+            <a:ext cx="460674" cy="225177"/>
+          </a:xfrm>
+          <a:prstGeom prst="rect">
+            <a:avLst/>
+          </a:prstGeom>
+        </p:spPr>
+      </p:pic>
     </p:spTree>
     <p:extLst>
       <p:ext uri="{BB962C8B-B14F-4D97-AF65-F5344CB8AC3E}">
-        <p14:creationId xmlns:p14="http://schemas.microsoft.com/office/powerpoint/2010/main" val="10562891"/>
+        <p14:creationId xmlns:p14="http://schemas.microsoft.com/office/powerpoint/2010/main" val="3858121115"/>
       </p:ext>
     </p:extLst>
   </p:cSld>
@@ -4720,15 +5982,45 @@
           </a:p>
         </p:txBody>
       </p:sp>
-      <p:sp>
-        <p:nvSpPr>
-          <p:cNvPr id="3" name="Content Placeholder 2">
+      <p:pic>
+        <p:nvPicPr>
+          <p:cNvPr id="4" name="Picture 3">
             <a:extLst>
               <a:ext uri="{FF2B5EF4-FFF2-40B4-BE49-F238E27FC236}">
-                <a16:creationId xmlns:a16="http://schemas.microsoft.com/office/drawing/2014/main" id="{298A5019-A617-4D76-638F-9E1FFD844F18}"/>
+                <a16:creationId xmlns:a16="http://schemas.microsoft.com/office/drawing/2014/main" id="{13B94EF1-6DF4-42B0-95FF-08547E0CB4B9}"/>
               </a:ext>
             </a:extLst>
           </p:cNvPr>
+          <p:cNvPicPr>
+            <a:picLocks noChangeAspect="1"/>
+          </p:cNvPicPr>
+          <p:nvPr/>
+        </p:nvPicPr>
+        <p:blipFill>
+          <a:blip r:embed="rId2"/>
+          <a:stretch>
+            <a:fillRect/>
+          </a:stretch>
+        </p:blipFill>
+        <p:spPr>
+          <a:xfrm>
+            <a:off x="5031279" y="1397488"/>
+            <a:ext cx="6019673" cy="5136052"/>
+          </a:xfrm>
+          <a:prstGeom prst="rect">
+            <a:avLst/>
+          </a:prstGeom>
+        </p:spPr>
+      </p:pic>
+      <p:sp>
+        <p:nvSpPr>
+          <p:cNvPr id="6" name="Content Placeholder 5">
+            <a:extLst>
+              <a:ext uri="{FF2B5EF4-FFF2-40B4-BE49-F238E27FC236}">
+                <a16:creationId xmlns:a16="http://schemas.microsoft.com/office/drawing/2014/main" id="{18FFE562-ACE8-422E-9C90-3AA00DB0CBE9}"/>
+              </a:ext>
+            </a:extLst>
+          </p:cNvPr>
           <p:cNvSpPr>
             <a:spLocks noGrp="1"/>
           </p:cNvSpPr>
@@ -4736,37 +6028,20 @@
             <p:ph idx="1"/>
           </p:nvPr>
         </p:nvSpPr>
-        <p:spPr/>
+        <p:spPr>
+          <a:xfrm>
+            <a:off x="1785815" y="1762369"/>
+            <a:ext cx="2059354" cy="472831"/>
+          </a:xfrm>
+        </p:spPr>
         <p:txBody>
           <a:bodyPr/>
           <a:lstStyle/>
           <a:p>
             <a:r>
               <a:rPr lang="en-US" dirty="0"/>
-              <a:t>Game Handler (Works on Server, Checks for Client Connections and Handles Game State)</a:t>
-            </a:r>
-          </a:p>
-          <a:p>
-            <a:r>
-              <a:rPr lang="en-US" dirty="0"/>
-              <a:t>Asteroid Factory &amp; Player (Uses RPC to Spawn Bullets and Asteroids)</a:t>
-            </a:r>
-          </a:p>
-          <a:p>
-            <a:r>
-              <a:rPr lang="en-US" dirty="0"/>
-              <a:t>Bullets and Asteroids (Uses RPC for movement, delta pos calculated on server and passed to client)</a:t>
-            </a:r>
-          </a:p>
-          <a:p>
-            <a:pPr marL="0" indent="0">
-              <a:buNone/>
-            </a:pPr>
-            <a:r>
-              <a:rPr lang="en-US" dirty="0"/>
-              <a:t> </a:t>
-            </a:r>
-            <a:endParaRPr lang="en-CA" dirty="0"/>
+              <a:t>Engine Side</a:t>
+            </a:r>
           </a:p>
         </p:txBody>
       </p:sp>
@@ -4805,7 +6080,7 @@
           <p:cNvPr id="2" name="Title 1">
             <a:extLst>
               <a:ext uri="{FF2B5EF4-FFF2-40B4-BE49-F238E27FC236}">
-                <a16:creationId xmlns:a16="http://schemas.microsoft.com/office/drawing/2014/main" id="{7F01E8AE-DD60-E55D-ABF3-E697B66BAA91}"/>
+                <a16:creationId xmlns:a16="http://schemas.microsoft.com/office/drawing/2014/main" id="{1E60C19F-8FFA-DBD1-D2AB-66630558063F}"/>
               </a:ext>
             </a:extLst>
           </p:cNvPr>
@@ -4823,11 +6098,8 @@
           <a:p>
             <a:r>
               <a:rPr lang="en-US" dirty="0"/>
-              <a:t>Game Handler</a:t>
-            </a:r>
-            <a:br>
-              <a:rPr lang="en-US" dirty="0"/>
-            </a:br>
+              <a:t>Network Overview</a:t>
+            </a:r>
             <a:endParaRPr lang="en-CA" dirty="0"/>
           </a:p>
         </p:txBody>
@@ -4837,7 +6109,7 @@
           <p:cNvPr id="3" name="Content Placeholder 2">
             <a:extLst>
               <a:ext uri="{FF2B5EF4-FFF2-40B4-BE49-F238E27FC236}">
-                <a16:creationId xmlns:a16="http://schemas.microsoft.com/office/drawing/2014/main" id="{AE6F3CFE-0FB3-308A-F736-A367BD59472F}"/>
+                <a16:creationId xmlns:a16="http://schemas.microsoft.com/office/drawing/2014/main" id="{298A5019-A617-4D76-638F-9E1FFD844F18}"/>
               </a:ext>
             </a:extLst>
           </p:cNvPr>
@@ -4855,25 +6127,28 @@
           <a:p>
             <a:r>
               <a:rPr lang="en-US" dirty="0"/>
-              <a:t>Present in Scene on Startup</a:t>
-            </a:r>
-          </a:p>
-          <a:p>
-            <a:r>
-              <a:rPr lang="en-US" dirty="0"/>
-              <a:t>Tracks No. Players and Game State</a:t>
-            </a:r>
-          </a:p>
-          <a:p>
-            <a:r>
-              <a:rPr lang="en-US" dirty="0"/>
-              <a:t>Update Game State when min players joins</a:t>
-            </a:r>
-          </a:p>
-          <a:p>
-            <a:r>
-              <a:rPr lang="en-US" dirty="0"/>
-              <a:t>Spawns' player ships when client connects</a:t>
+              <a:t>Game Handler (Works on Server, Checks for Client Connections and Handles Game State)</a:t>
+            </a:r>
+          </a:p>
+          <a:p>
+            <a:r>
+              <a:rPr lang="en-US" dirty="0"/>
+              <a:t>Asteroid Factory &amp; Player (Uses RPC to Spawn Bullets and Asteroids)</a:t>
+            </a:r>
+          </a:p>
+          <a:p>
+            <a:r>
+              <a:rPr lang="en-US" dirty="0"/>
+              <a:t>Bullets and Asteroids (Uses RPC for movement, delta pos calculated on server and passed to client)</a:t>
+            </a:r>
+          </a:p>
+          <a:p>
+            <a:pPr marL="0" indent="0">
+              <a:buNone/>
+            </a:pPr>
+            <a:r>
+              <a:rPr lang="en-US" dirty="0"/>
+              <a:t> </a:t>
             </a:r>
             <a:endParaRPr lang="en-CA" dirty="0"/>
           </a:p>
@@ -4882,7 +6157,7 @@
     </p:spTree>
     <p:extLst>
       <p:ext uri="{BB962C8B-B14F-4D97-AF65-F5344CB8AC3E}">
-        <p14:creationId xmlns:p14="http://schemas.microsoft.com/office/powerpoint/2010/main" val="1647282100"/>
+        <p14:creationId xmlns:p14="http://schemas.microsoft.com/office/powerpoint/2010/main" val="1932216570"/>
       </p:ext>
     </p:extLst>
   </p:cSld>
@@ -4914,7 +6189,7 @@
           <p:cNvPr id="2" name="Title 1">
             <a:extLst>
               <a:ext uri="{FF2B5EF4-FFF2-40B4-BE49-F238E27FC236}">
-                <a16:creationId xmlns:a16="http://schemas.microsoft.com/office/drawing/2014/main" id="{9C39D750-5D90-F4ED-6D98-D4F63952A862}"/>
+                <a16:creationId xmlns:a16="http://schemas.microsoft.com/office/drawing/2014/main" id="{2FF08045-7E8C-2AB3-E047-DACE135BB3BB}"/>
               </a:ext>
             </a:extLst>
           </p:cNvPr>
@@ -4925,60 +6200,60 @@
             <p:ph type="title"/>
           </p:nvPr>
         </p:nvSpPr>
-        <p:spPr/>
-        <p:txBody>
-          <a:bodyPr/>
+        <p:spPr>
+          <a:xfrm>
+            <a:off x="1371601" y="685799"/>
+            <a:ext cx="3169138" cy="3667369"/>
+          </a:xfrm>
+        </p:spPr>
+        <p:txBody>
+          <a:bodyPr>
+            <a:normAutofit/>
+          </a:bodyPr>
           <a:lstStyle/>
           <a:p>
             <a:r>
               <a:rPr lang="en-US" dirty="0"/>
-              <a:t>Player</a:t>
+              <a:t>Multiplayer Network Handling</a:t>
             </a:r>
             <a:endParaRPr lang="en-CA" dirty="0"/>
           </a:p>
         </p:txBody>
       </p:sp>
-      <p:sp>
-        <p:nvSpPr>
-          <p:cNvPr id="3" name="Content Placeholder 2">
+      <p:pic>
+        <p:nvPicPr>
+          <p:cNvPr id="3" name="Picture 2">
             <a:extLst>
               <a:ext uri="{FF2B5EF4-FFF2-40B4-BE49-F238E27FC236}">
-                <a16:creationId xmlns:a16="http://schemas.microsoft.com/office/drawing/2014/main" id="{2033ECF1-40A4-200F-A0DC-227779671821}"/>
+                <a16:creationId xmlns:a16="http://schemas.microsoft.com/office/drawing/2014/main" id="{14063646-C2AF-4F86-9D65-E2C279D6159C}"/>
               </a:ext>
             </a:extLst>
           </p:cNvPr>
-          <p:cNvSpPr>
-            <a:spLocks noGrp="1"/>
-          </p:cNvSpPr>
-          <p:nvPr>
-            <p:ph idx="1"/>
-          </p:nvPr>
-        </p:nvSpPr>
-        <p:spPr/>
-        <p:txBody>
-          <a:bodyPr/>
-          <a:lstStyle/>
-          <a:p>
-            <a:r>
-              <a:rPr lang="en-US" dirty="0"/>
-              <a:t>Spawned on Server in response to client connection</a:t>
-            </a:r>
-          </a:p>
-          <a:p>
-            <a:r>
-              <a:rPr lang="en-US" dirty="0"/>
-              <a:t>Sends RPCs to Spawn Bullets</a:t>
-            </a:r>
-          </a:p>
-          <a:p>
-            <a:endParaRPr lang="en-CA" dirty="0"/>
-          </a:p>
-        </p:txBody>
-      </p:sp>
+          <p:cNvPicPr>
+            <a:picLocks noChangeAspect="1"/>
+          </p:cNvPicPr>
+          <p:nvPr/>
+        </p:nvPicPr>
+        <p:blipFill>
+          <a:blip r:embed="rId2"/>
+          <a:stretch>
+            <a:fillRect/>
+          </a:stretch>
+        </p:blipFill>
+        <p:spPr>
+          <a:xfrm>
+            <a:off x="5330342" y="-27510"/>
+            <a:ext cx="6861658" cy="6885510"/>
+          </a:xfrm>
+          <a:prstGeom prst="rect">
+            <a:avLst/>
+          </a:prstGeom>
+        </p:spPr>
+      </p:pic>
     </p:spTree>
     <p:extLst>
       <p:ext uri="{BB962C8B-B14F-4D97-AF65-F5344CB8AC3E}">
-        <p14:creationId xmlns:p14="http://schemas.microsoft.com/office/powerpoint/2010/main" val="2083622113"/>
+        <p14:creationId xmlns:p14="http://schemas.microsoft.com/office/powerpoint/2010/main" val="10562891"/>
       </p:ext>
     </p:extLst>
   </p:cSld>
@@ -5010,7 +6285,7 @@
           <p:cNvPr id="2" name="Title 1">
             <a:extLst>
               <a:ext uri="{FF2B5EF4-FFF2-40B4-BE49-F238E27FC236}">
-                <a16:creationId xmlns:a16="http://schemas.microsoft.com/office/drawing/2014/main" id="{71611EB6-F338-090D-106F-204A8835676B}"/>
+                <a16:creationId xmlns:a16="http://schemas.microsoft.com/office/drawing/2014/main" id="{7F01E8AE-DD60-E55D-ABF3-E697B66BAA91}"/>
               </a:ext>
             </a:extLst>
           </p:cNvPr>
@@ -5028,8 +6303,11 @@
           <a:p>
             <a:r>
               <a:rPr lang="en-US" dirty="0"/>
-              <a:t>Projectiles</a:t>
-            </a:r>
+              <a:t>Game Handler</a:t>
+            </a:r>
+            <a:br>
+              <a:rPr lang="en-US" dirty="0"/>
+            </a:br>
             <a:endParaRPr lang="en-CA" dirty="0"/>
           </a:p>
         </p:txBody>
@@ -5039,7 +6317,7 @@
           <p:cNvPr id="3" name="Content Placeholder 2">
             <a:extLst>
               <a:ext uri="{FF2B5EF4-FFF2-40B4-BE49-F238E27FC236}">
-                <a16:creationId xmlns:a16="http://schemas.microsoft.com/office/drawing/2014/main" id="{D3878A3F-7193-7BA6-8935-811550E1FCE5}"/>
+                <a16:creationId xmlns:a16="http://schemas.microsoft.com/office/drawing/2014/main" id="{AE6F3CFE-0FB3-308A-F736-A367BD59472F}"/>
               </a:ext>
             </a:extLst>
           </p:cNvPr>
@@ -5050,35 +6328,76 @@
             <p:ph idx="1"/>
           </p:nvPr>
         </p:nvSpPr>
-        <p:spPr/>
+        <p:spPr>
+          <a:xfrm>
+            <a:off x="1371600" y="2286000"/>
+            <a:ext cx="5162062" cy="1801446"/>
+          </a:xfrm>
+        </p:spPr>
         <p:txBody>
           <a:bodyPr/>
           <a:lstStyle/>
           <a:p>
             <a:r>
               <a:rPr lang="en-US" dirty="0"/>
-              <a:t>Simple Entities spawned on Server and Replicated across the network</a:t>
-            </a:r>
-          </a:p>
-          <a:p>
-            <a:r>
-              <a:rPr lang="en-US" dirty="0"/>
-              <a:t>Uses RPCs for movement</a:t>
-            </a:r>
-          </a:p>
-          <a:p>
-            <a:r>
-              <a:rPr lang="en-US" dirty="0"/>
-              <a:t>Uses prediction for smooth movement</a:t>
+              <a:t>Present in Scene on Startup</a:t>
+            </a:r>
+          </a:p>
+          <a:p>
+            <a:r>
+              <a:rPr lang="en-US" dirty="0"/>
+              <a:t>Tracks No. Players and Game State</a:t>
+            </a:r>
+          </a:p>
+          <a:p>
+            <a:r>
+              <a:rPr lang="en-US" dirty="0"/>
+              <a:t>Update Game State when min players joins</a:t>
+            </a:r>
+          </a:p>
+          <a:p>
+            <a:r>
+              <a:rPr lang="en-US" dirty="0"/>
+              <a:t>Spawns' player ships when client connects</a:t>
             </a:r>
             <a:endParaRPr lang="en-CA" dirty="0"/>
           </a:p>
         </p:txBody>
       </p:sp>
+      <p:pic>
+        <p:nvPicPr>
+          <p:cNvPr id="4" name="Picture 3">
+            <a:extLst>
+              <a:ext uri="{FF2B5EF4-FFF2-40B4-BE49-F238E27FC236}">
+                <a16:creationId xmlns:a16="http://schemas.microsoft.com/office/drawing/2014/main" id="{B1B65CC5-E021-4CCA-B8C5-6AE1B85DCE7B}"/>
+              </a:ext>
+            </a:extLst>
+          </p:cNvPr>
+          <p:cNvPicPr>
+            <a:picLocks noChangeAspect="1"/>
+          </p:cNvPicPr>
+          <p:nvPr/>
+        </p:nvPicPr>
+        <p:blipFill>
+          <a:blip r:embed="rId2"/>
+          <a:stretch>
+            <a:fillRect/>
+          </a:stretch>
+        </p:blipFill>
+        <p:spPr>
+          <a:xfrm>
+            <a:off x="6892116" y="983769"/>
+            <a:ext cx="4367494" cy="4890462"/>
+          </a:xfrm>
+          <a:prstGeom prst="rect">
+            <a:avLst/>
+          </a:prstGeom>
+        </p:spPr>
+      </p:pic>
     </p:spTree>
     <p:extLst>
       <p:ext uri="{BB962C8B-B14F-4D97-AF65-F5344CB8AC3E}">
-        <p14:creationId xmlns:p14="http://schemas.microsoft.com/office/powerpoint/2010/main" val="3817045069"/>
+        <p14:creationId xmlns:p14="http://schemas.microsoft.com/office/powerpoint/2010/main" val="1647282100"/>
       </p:ext>
     </p:extLst>
   </p:cSld>
@@ -5110,7 +6429,7 @@
           <p:cNvPr id="2" name="Title 1">
             <a:extLst>
               <a:ext uri="{FF2B5EF4-FFF2-40B4-BE49-F238E27FC236}">
-                <a16:creationId xmlns:a16="http://schemas.microsoft.com/office/drawing/2014/main" id="{4CD0E974-F2BB-1E2A-D46E-1613EFB342D4}"/>
+                <a16:creationId xmlns:a16="http://schemas.microsoft.com/office/drawing/2014/main" id="{7F01E8AE-DD60-E55D-ABF3-E697B66BAA91}"/>
               </a:ext>
             </a:extLst>
           </p:cNvPr>
@@ -5121,64 +6440,63 @@
             <p:ph type="title"/>
           </p:nvPr>
         </p:nvSpPr>
-        <p:spPr/>
-        <p:txBody>
-          <a:bodyPr/>
+        <p:spPr>
+          <a:xfrm>
+            <a:off x="1105667" y="622300"/>
+            <a:ext cx="2222500" cy="1485900"/>
+          </a:xfrm>
+        </p:spPr>
+        <p:txBody>
+          <a:bodyPr>
+            <a:normAutofit fontScale="90000"/>
+          </a:bodyPr>
           <a:lstStyle/>
           <a:p>
             <a:r>
               <a:rPr lang="en-US" dirty="0"/>
-              <a:t>Asteroids &amp; Spawning</a:t>
-            </a:r>
+              <a:t>Game Handler</a:t>
+            </a:r>
+            <a:br>
+              <a:rPr lang="en-US" dirty="0"/>
+            </a:br>
             <a:endParaRPr lang="en-CA" dirty="0"/>
           </a:p>
         </p:txBody>
       </p:sp>
-      <p:sp>
-        <p:nvSpPr>
-          <p:cNvPr id="3" name="Content Placeholder 2">
+      <p:pic>
+        <p:nvPicPr>
+          <p:cNvPr id="7" name="Picture 6">
             <a:extLst>
               <a:ext uri="{FF2B5EF4-FFF2-40B4-BE49-F238E27FC236}">
-                <a16:creationId xmlns:a16="http://schemas.microsoft.com/office/drawing/2014/main" id="{889EBC58-8EAB-950E-18EC-DFC6B6F08CA4}"/>
+                <a16:creationId xmlns:a16="http://schemas.microsoft.com/office/drawing/2014/main" id="{1F34D777-A937-482B-8811-EF6FD67BA27A}"/>
               </a:ext>
             </a:extLst>
           </p:cNvPr>
-          <p:cNvSpPr>
-            <a:spLocks noGrp="1"/>
-          </p:cNvSpPr>
-          <p:nvPr>
-            <p:ph idx="1"/>
-          </p:nvPr>
-        </p:nvSpPr>
-        <p:spPr/>
-        <p:txBody>
-          <a:bodyPr/>
-          <a:lstStyle/>
-          <a:p>
-            <a:r>
-              <a:rPr lang="en-US" dirty="0"/>
-              <a:t>Asteroid Spawner relies on Game Handler for Game State and accordingly spawn asteroids</a:t>
-            </a:r>
-          </a:p>
-          <a:p>
-            <a:r>
-              <a:rPr lang="en-US" dirty="0"/>
-              <a:t>Uses RPCs for spawning</a:t>
-            </a:r>
-          </a:p>
-          <a:p>
-            <a:r>
-              <a:rPr lang="en-US" dirty="0"/>
-              <a:t>Asteroids are like projectiles in terms of functioning</a:t>
-            </a:r>
-            <a:endParaRPr lang="en-CA" dirty="0"/>
-          </a:p>
-        </p:txBody>
-      </p:sp>
+          <p:cNvPicPr>
+            <a:picLocks noChangeAspect="1"/>
+          </p:cNvPicPr>
+          <p:nvPr/>
+        </p:nvPicPr>
+        <p:blipFill>
+          <a:blip r:embed="rId2"/>
+          <a:stretch>
+            <a:fillRect/>
+          </a:stretch>
+        </p:blipFill>
+        <p:spPr>
+          <a:xfrm>
+            <a:off x="3187701" y="-90346"/>
+            <a:ext cx="10803024" cy="6948346"/>
+          </a:xfrm>
+          <a:prstGeom prst="rect">
+            <a:avLst/>
+          </a:prstGeom>
+        </p:spPr>
+      </p:pic>
     </p:spTree>
     <p:extLst>
       <p:ext uri="{BB962C8B-B14F-4D97-AF65-F5344CB8AC3E}">
-        <p14:creationId xmlns:p14="http://schemas.microsoft.com/office/powerpoint/2010/main" val="3303553891"/>
+        <p14:creationId xmlns:p14="http://schemas.microsoft.com/office/powerpoint/2010/main" val="1780869308"/>
       </p:ext>
     </p:extLst>
   </p:cSld>
@@ -5210,7 +6528,7 @@
           <p:cNvPr id="2" name="Title 1">
             <a:extLst>
               <a:ext uri="{FF2B5EF4-FFF2-40B4-BE49-F238E27FC236}">
-                <a16:creationId xmlns:a16="http://schemas.microsoft.com/office/drawing/2014/main" id="{7116057A-041D-CD14-7ED0-CBB913DBAC21}"/>
+                <a16:creationId xmlns:a16="http://schemas.microsoft.com/office/drawing/2014/main" id="{7F01E8AE-DD60-E55D-ABF3-E697B66BAA91}"/>
               </a:ext>
             </a:extLst>
           </p:cNvPr>
@@ -5221,51 +6539,63 @@
             <p:ph type="title"/>
           </p:nvPr>
         </p:nvSpPr>
-        <p:spPr/>
-        <p:txBody>
-          <a:bodyPr/>
+        <p:spPr>
+          <a:xfrm>
+            <a:off x="1105667" y="622300"/>
+            <a:ext cx="2222500" cy="1485900"/>
+          </a:xfrm>
+        </p:spPr>
+        <p:txBody>
+          <a:bodyPr>
+            <a:normAutofit fontScale="90000"/>
+          </a:bodyPr>
           <a:lstStyle/>
           <a:p>
             <a:r>
               <a:rPr lang="en-US" dirty="0"/>
-              <a:t>Interpolation /  Client-Side Prediction</a:t>
+              <a:t>Game Handler</a:t>
             </a:r>
             <a:br>
-              <a:rPr lang="en-CA" dirty="0"/>
+              <a:rPr lang="en-US" dirty="0"/>
             </a:br>
             <a:endParaRPr lang="en-CA" dirty="0"/>
           </a:p>
         </p:txBody>
       </p:sp>
-      <p:sp>
-        <p:nvSpPr>
-          <p:cNvPr id="3" name="Content Placeholder 2">
+      <p:pic>
+        <p:nvPicPr>
+          <p:cNvPr id="3" name="Picture 2">
             <a:extLst>
               <a:ext uri="{FF2B5EF4-FFF2-40B4-BE49-F238E27FC236}">
-                <a16:creationId xmlns:a16="http://schemas.microsoft.com/office/drawing/2014/main" id="{5086EC7A-10B1-B0BF-37FF-EE50FF859ECE}"/>
+                <a16:creationId xmlns:a16="http://schemas.microsoft.com/office/drawing/2014/main" id="{1CAC8673-1769-4CDA-9EA7-0C2CB790E805}"/>
               </a:ext>
             </a:extLst>
           </p:cNvPr>
-          <p:cNvSpPr>
-            <a:spLocks noGrp="1"/>
-          </p:cNvSpPr>
-          <p:nvPr>
-            <p:ph idx="1"/>
-          </p:nvPr>
-        </p:nvSpPr>
-        <p:spPr/>
-        <p:txBody>
-          <a:bodyPr/>
-          <a:lstStyle/>
-          <a:p>
-            <a:endParaRPr lang="en-CA"/>
-          </a:p>
-        </p:txBody>
-      </p:sp>
+          <p:cNvPicPr>
+            <a:picLocks noChangeAspect="1"/>
+          </p:cNvPicPr>
+          <p:nvPr/>
+        </p:nvPicPr>
+        <p:blipFill>
+          <a:blip r:embed="rId2"/>
+          <a:stretch>
+            <a:fillRect/>
+          </a:stretch>
+        </p:blipFill>
+        <p:spPr>
+          <a:xfrm>
+            <a:off x="3061246" y="-139700"/>
+            <a:ext cx="10373687" cy="7406091"/>
+          </a:xfrm>
+          <a:prstGeom prst="rect">
+            <a:avLst/>
+          </a:prstGeom>
+        </p:spPr>
+      </p:pic>
     </p:spTree>
     <p:extLst>
       <p:ext uri="{BB962C8B-B14F-4D97-AF65-F5344CB8AC3E}">
-        <p14:creationId xmlns:p14="http://schemas.microsoft.com/office/powerpoint/2010/main" val="1739904808"/>
+        <p14:creationId xmlns:p14="http://schemas.microsoft.com/office/powerpoint/2010/main" val="988199918"/>
       </p:ext>
     </p:extLst>
   </p:cSld>
@@ -5542,15 +6872,6 @@
 </file>
 
 <file path=customXml/item2.xml><?xml version="1.0" encoding="utf-8"?>
-<?mso-contentType ?>
-<FormTemplates xmlns="http://schemas.microsoft.com/sharepoint/v3/contenttype/forms">
-  <Display>DocumentLibraryForm</Display>
-  <Edit>DocumentLibraryForm</Edit>
-  <New>DocumentLibraryForm</New>
-</FormTemplates>
-</file>
-
-<file path=customXml/item3.xml><?xml version="1.0" encoding="utf-8"?>
 <ct:contentTypeSchema xmlns:ct="http://schemas.microsoft.com/office/2006/metadata/contentType" xmlns:ma="http://schemas.microsoft.com/office/2006/metadata/properties/metaAttributes" ct:_="" ma:_="" ma:contentTypeName="Document" ma:contentTypeID="0x010100109A66ED96897440A5353CBC43C69C5C" ma:contentTypeVersion="15" ma:contentTypeDescription="Create a new document." ma:contentTypeScope="" ma:versionID="6f4ecf3be95950aaecfc4d2fbe88e78e">
   <xsd:schema xmlns:xsd="http://www.w3.org/2001/XMLSchema" xmlns:xs="http://www.w3.org/2001/XMLSchema" xmlns:p="http://schemas.microsoft.com/office/2006/metadata/properties" xmlns:ns3="8ef3b232-4f83-4ac3-93e0-8af40791938c" xmlns:ns4="0e7b9341-1a0f-4911-b676-5840cd2ede95" targetNamespace="http://schemas.microsoft.com/office/2006/metadata/properties" ma:root="true" ma:fieldsID="bb87a4993aa515e66054f8590c423ff8" ns3:_="" ns4:_="">
     <xsd:import namespace="8ef3b232-4f83-4ac3-93e0-8af40791938c"/>
@@ -5783,6 +7104,15 @@
 </ct:contentTypeSchema>
 </file>
 
+<file path=customXml/item3.xml><?xml version="1.0" encoding="utf-8"?>
+<?mso-contentType ?>
+<FormTemplates xmlns="http://schemas.microsoft.com/sharepoint/v3/contenttype/forms">
+  <Display>DocumentLibraryForm</Display>
+  <Edit>DocumentLibraryForm</Edit>
+  <New>DocumentLibraryForm</New>
+</FormTemplates>
+</file>
+
 <file path=customXml/itemProps1.xml><?xml version="1.0" encoding="utf-8"?>
 <ds:datastoreItem xmlns:ds="http://schemas.openxmlformats.org/officeDocument/2006/customXml" ds:itemID="{D6B684E3-7F57-449C-A891-60D19D6617B4}">
   <ds:schemaRefs>
@@ -5801,14 +7131,6 @@
 </file>
 
 <file path=customXml/itemProps2.xml><?xml version="1.0" encoding="utf-8"?>
-<ds:datastoreItem xmlns:ds="http://schemas.openxmlformats.org/officeDocument/2006/customXml" ds:itemID="{FF8C05F3-6C1F-4D9F-9761-3194EC164427}">
-  <ds:schemaRefs>
-    <ds:schemaRef ds:uri="http://schemas.microsoft.com/sharepoint/v3/contenttype/forms"/>
-  </ds:schemaRefs>
-</ds:datastoreItem>
-</file>
-
-<file path=customXml/itemProps3.xml><?xml version="1.0" encoding="utf-8"?>
 <ds:datastoreItem xmlns:ds="http://schemas.openxmlformats.org/officeDocument/2006/customXml" ds:itemID="{0F903631-368A-44BD-BCC8-FC92D0431721}">
   <ds:schemaRefs>
     <ds:schemaRef ds:uri="http://schemas.microsoft.com/office/2006/metadata/contentType"/>
@@ -5825,4 +7147,12 @@
     <ds:schemaRef ds:uri="http://schemas.microsoft.com/internal/obd"/>
   </ds:schemaRefs>
 </ds:datastoreItem>
+</file>
+
+<file path=customXml/itemProps3.xml><?xml version="1.0" encoding="utf-8"?>
+<ds:datastoreItem xmlns:ds="http://schemas.openxmlformats.org/officeDocument/2006/customXml" ds:itemID="{FF8C05F3-6C1F-4D9F-9761-3194EC164427}">
+  <ds:schemaRefs>
+    <ds:schemaRef ds:uri="http://schemas.microsoft.com/sharepoint/v3/contenttype/forms"/>
+  </ds:schemaRefs>
+</ds:datastoreItem>
 </file>
--- a/NetworkAsgn2.pptx
+++ b/NetworkAsgn2.pptx
@@ -4990,10 +4990,10 @@
       </p:sp>
       <p:pic>
         <p:nvPicPr>
-          <p:cNvPr id="3" name="Picture 2">
+          <p:cNvPr id="4" name="Picture 3">
             <a:extLst>
               <a:ext uri="{FF2B5EF4-FFF2-40B4-BE49-F238E27FC236}">
-                <a16:creationId xmlns:a16="http://schemas.microsoft.com/office/drawing/2014/main" id="{512602E7-9768-4B39-8E9C-D5A07680574D}"/>
+                <a16:creationId xmlns:a16="http://schemas.microsoft.com/office/drawing/2014/main" id="{8D911624-0311-43F4-B3F6-9510BEE896DE}"/>
               </a:ext>
             </a:extLst>
           </p:cNvPr>
@@ -5010,8 +5010,8 @@
         </p:blipFill>
         <p:spPr>
           <a:xfrm>
-            <a:off x="4013009" y="0"/>
-            <a:ext cx="9169782" cy="6858000"/>
+            <a:off x="3763712" y="0"/>
+            <a:ext cx="10432329" cy="6858000"/>
           </a:xfrm>
           <a:prstGeom prst="rect">
             <a:avLst/>
@@ -6864,14 +6864,6 @@
 </file>
 
 <file path=customXml/item1.xml><?xml version="1.0" encoding="utf-8"?>
-<p:properties xmlns:p="http://schemas.microsoft.com/office/2006/metadata/properties" xmlns:xsi="http://www.w3.org/2001/XMLSchema-instance" xmlns:pc="http://schemas.microsoft.com/office/infopath/2007/PartnerControls">
-  <documentManagement>
-    <_activity xmlns="8ef3b232-4f83-4ac3-93e0-8af40791938c" xsi:nil="true"/>
-  </documentManagement>
-</p:properties>
-</file>
-
-<file path=customXml/item2.xml><?xml version="1.0" encoding="utf-8"?>
 <ct:contentTypeSchema xmlns:ct="http://schemas.microsoft.com/office/2006/metadata/contentType" xmlns:ma="http://schemas.microsoft.com/office/2006/metadata/properties/metaAttributes" ct:_="" ma:_="" ma:contentTypeName="Document" ma:contentTypeID="0x010100109A66ED96897440A5353CBC43C69C5C" ma:contentTypeVersion="15" ma:contentTypeDescription="Create a new document." ma:contentTypeScope="" ma:versionID="6f4ecf3be95950aaecfc4d2fbe88e78e">
   <xsd:schema xmlns:xsd="http://www.w3.org/2001/XMLSchema" xmlns:xs="http://www.w3.org/2001/XMLSchema" xmlns:p="http://schemas.microsoft.com/office/2006/metadata/properties" xmlns:ns3="8ef3b232-4f83-4ac3-93e0-8af40791938c" xmlns:ns4="0e7b9341-1a0f-4911-b676-5840cd2ede95" targetNamespace="http://schemas.microsoft.com/office/2006/metadata/properties" ma:root="true" ma:fieldsID="bb87a4993aa515e66054f8590c423ff8" ns3:_="" ns4:_="">
     <xsd:import namespace="8ef3b232-4f83-4ac3-93e0-8af40791938c"/>
@@ -7104,6 +7096,14 @@
 </ct:contentTypeSchema>
 </file>
 
+<file path=customXml/item2.xml><?xml version="1.0" encoding="utf-8"?>
+<p:properties xmlns:p="http://schemas.microsoft.com/office/2006/metadata/properties" xmlns:xsi="http://www.w3.org/2001/XMLSchema-instance" xmlns:pc="http://schemas.microsoft.com/office/infopath/2007/PartnerControls">
+  <documentManagement>
+    <_activity xmlns="8ef3b232-4f83-4ac3-93e0-8af40791938c" xsi:nil="true"/>
+  </documentManagement>
+</p:properties>
+</file>
+
 <file path=customXml/item3.xml><?xml version="1.0" encoding="utf-8"?>
 <?mso-contentType ?>
 <FormTemplates xmlns="http://schemas.microsoft.com/sharepoint/v3/contenttype/forms">
@@ -7114,23 +7114,6 @@
 </file>
 
 <file path=customXml/itemProps1.xml><?xml version="1.0" encoding="utf-8"?>
-<ds:datastoreItem xmlns:ds="http://schemas.openxmlformats.org/officeDocument/2006/customXml" ds:itemID="{D6B684E3-7F57-449C-A891-60D19D6617B4}">
-  <ds:schemaRefs>
-    <ds:schemaRef ds:uri="http://purl.org/dc/dcmitype/"/>
-    <ds:schemaRef ds:uri="http://schemas.openxmlformats.org/package/2006/metadata/core-properties"/>
-    <ds:schemaRef ds:uri="http://schemas.microsoft.com/office/2006/documentManagement/types"/>
-    <ds:schemaRef ds:uri="http://purl.org/dc/elements/1.1/"/>
-    <ds:schemaRef ds:uri="http://www.w3.org/XML/1998/namespace"/>
-    <ds:schemaRef ds:uri="http://schemas.microsoft.com/office/infopath/2007/PartnerControls"/>
-    <ds:schemaRef ds:uri="0e7b9341-1a0f-4911-b676-5840cd2ede95"/>
-    <ds:schemaRef ds:uri="8ef3b232-4f83-4ac3-93e0-8af40791938c"/>
-    <ds:schemaRef ds:uri="http://schemas.microsoft.com/office/2006/metadata/properties"/>
-    <ds:schemaRef ds:uri="http://purl.org/dc/terms/"/>
-  </ds:schemaRefs>
-</ds:datastoreItem>
-</file>
-
-<file path=customXml/itemProps2.xml><?xml version="1.0" encoding="utf-8"?>
 <ds:datastoreItem xmlns:ds="http://schemas.openxmlformats.org/officeDocument/2006/customXml" ds:itemID="{0F903631-368A-44BD-BCC8-FC92D0431721}">
   <ds:schemaRefs>
     <ds:schemaRef ds:uri="http://schemas.microsoft.com/office/2006/metadata/contentType"/>
@@ -7149,6 +7132,23 @@
 </ds:datastoreItem>
 </file>
 
+<file path=customXml/itemProps2.xml><?xml version="1.0" encoding="utf-8"?>
+<ds:datastoreItem xmlns:ds="http://schemas.openxmlformats.org/officeDocument/2006/customXml" ds:itemID="{D6B684E3-7F57-449C-A891-60D19D6617B4}">
+  <ds:schemaRefs>
+    <ds:schemaRef ds:uri="http://purl.org/dc/dcmitype/"/>
+    <ds:schemaRef ds:uri="http://schemas.openxmlformats.org/package/2006/metadata/core-properties"/>
+    <ds:schemaRef ds:uri="http://schemas.microsoft.com/office/2006/documentManagement/types"/>
+    <ds:schemaRef ds:uri="http://purl.org/dc/elements/1.1/"/>
+    <ds:schemaRef ds:uri="http://www.w3.org/XML/1998/namespace"/>
+    <ds:schemaRef ds:uri="http://schemas.microsoft.com/office/infopath/2007/PartnerControls"/>
+    <ds:schemaRef ds:uri="0e7b9341-1a0f-4911-b676-5840cd2ede95"/>
+    <ds:schemaRef ds:uri="8ef3b232-4f83-4ac3-93e0-8af40791938c"/>
+    <ds:schemaRef ds:uri="http://schemas.microsoft.com/office/2006/metadata/properties"/>
+    <ds:schemaRef ds:uri="http://purl.org/dc/terms/"/>
+  </ds:schemaRefs>
+</ds:datastoreItem>
+</file>
+
 <file path=customXml/itemProps3.xml><?xml version="1.0" encoding="utf-8"?>
 <ds:datastoreItem xmlns:ds="http://schemas.openxmlformats.org/officeDocument/2006/customXml" ds:itemID="{FF8C05F3-6C1F-4D9F-9761-3194EC164427}">
   <ds:schemaRefs>

--- a/NetworkAsgn2.pptx
+++ b/NetworkAsgn2.pptx
@@ -19,11 +19,9 @@
     <p:sldId id="272" r:id="rId16"/>
     <p:sldId id="262" r:id="rId17"/>
     <p:sldId id="269" r:id="rId18"/>
-    <p:sldId id="270" r:id="rId19"/>
-    <p:sldId id="263" r:id="rId20"/>
-    <p:sldId id="273" r:id="rId21"/>
-    <p:sldId id="274" r:id="rId22"/>
-    <p:sldId id="275" r:id="rId23"/>
+    <p:sldId id="263" r:id="rId19"/>
+    <p:sldId id="273" r:id="rId20"/>
+    <p:sldId id="274" r:id="rId21"/>
   </p:sldIdLst>
   <p:sldSz cx="12192000" cy="6858000"/>
   <p:notesSz cx="6858000" cy="9144000"/>
@@ -4367,10 +4365,10 @@
       </p:sp>
       <p:pic>
         <p:nvPicPr>
-          <p:cNvPr id="4" name="Picture 3">
+          <p:cNvPr id="5" name="Picture 4">
             <a:extLst>
               <a:ext uri="{FF2B5EF4-FFF2-40B4-BE49-F238E27FC236}">
-                <a16:creationId xmlns:a16="http://schemas.microsoft.com/office/drawing/2014/main" id="{261A1DBE-4898-4F59-A103-683EEB466E57}"/>
+                <a16:creationId xmlns:a16="http://schemas.microsoft.com/office/drawing/2014/main" id="{65243FB0-4CCE-4E9E-94BF-8A585793DFB5}"/>
               </a:ext>
             </a:extLst>
           </p:cNvPr>
@@ -4387,8 +4385,8 @@
         </p:blipFill>
         <p:spPr>
           <a:xfrm>
-            <a:off x="7366000" y="990600"/>
-            <a:ext cx="4382112" cy="5325218"/>
+            <a:off x="7680107" y="1279108"/>
+            <a:ext cx="3772254" cy="4588292"/>
           </a:xfrm>
           <a:prstGeom prst="rect">
             <a:avLst/>
@@ -4456,10 +4454,10 @@
       </p:sp>
       <p:pic>
         <p:nvPicPr>
-          <p:cNvPr id="9" name="Picture 8">
+          <p:cNvPr id="3" name="Picture 2">
             <a:extLst>
               <a:ext uri="{FF2B5EF4-FFF2-40B4-BE49-F238E27FC236}">
-                <a16:creationId xmlns:a16="http://schemas.microsoft.com/office/drawing/2014/main" id="{13ED7858-8044-4E02-A3E2-CD068F2249DC}"/>
+                <a16:creationId xmlns:a16="http://schemas.microsoft.com/office/drawing/2014/main" id="{243ED59D-8EEF-431B-80D7-2317180785D4}"/>
               </a:ext>
             </a:extLst>
           </p:cNvPr>
@@ -4476,8 +4474,8 @@
         </p:blipFill>
         <p:spPr>
           <a:xfrm>
-            <a:off x="3708400" y="0"/>
-            <a:ext cx="9279466" cy="6959600"/>
+            <a:off x="3818882" y="0"/>
+            <a:ext cx="10103160" cy="6858000"/>
           </a:xfrm>
           <a:prstGeom prst="rect">
             <a:avLst/>
@@ -4519,7 +4517,7 @@
           <p:cNvPr id="2" name="Title 1">
             <a:extLst>
               <a:ext uri="{FF2B5EF4-FFF2-40B4-BE49-F238E27FC236}">
-                <a16:creationId xmlns:a16="http://schemas.microsoft.com/office/drawing/2014/main" id="{71611EB6-F338-090D-106F-204A8835676B}"/>
+                <a16:creationId xmlns:a16="http://schemas.microsoft.com/office/drawing/2014/main" id="{4CD0E974-F2BB-1E2A-D46E-1613EFB342D4}"/>
               </a:ext>
             </a:extLst>
           </p:cNvPr>
@@ -4530,19 +4528,60 @@
             <p:ph type="title"/>
           </p:nvPr>
         </p:nvSpPr>
-        <p:spPr>
-          <a:xfrm>
-            <a:off x="1371600" y="685800"/>
-            <a:ext cx="1968500" cy="1485900"/>
-          </a:xfrm>
-        </p:spPr>
+        <p:spPr/>
         <p:txBody>
           <a:bodyPr/>
           <a:lstStyle/>
           <a:p>
             <a:r>
               <a:rPr lang="en-US" dirty="0"/>
-              <a:t>Bullets</a:t>
+              <a:t>Asteroids &amp; Spawning</a:t>
+            </a:r>
+            <a:endParaRPr lang="en-CA" dirty="0"/>
+          </a:p>
+        </p:txBody>
+      </p:sp>
+      <p:sp>
+        <p:nvSpPr>
+          <p:cNvPr id="3" name="Content Placeholder 2">
+            <a:extLst>
+              <a:ext uri="{FF2B5EF4-FFF2-40B4-BE49-F238E27FC236}">
+                <a16:creationId xmlns:a16="http://schemas.microsoft.com/office/drawing/2014/main" id="{889EBC58-8EAB-950E-18EC-DFC6B6F08CA4}"/>
+              </a:ext>
+            </a:extLst>
+          </p:cNvPr>
+          <p:cNvSpPr>
+            <a:spLocks noGrp="1"/>
+          </p:cNvSpPr>
+          <p:nvPr>
+            <p:ph idx="1"/>
+          </p:nvPr>
+        </p:nvSpPr>
+        <p:spPr>
+          <a:xfrm>
+            <a:off x="3465052" y="1911765"/>
+            <a:ext cx="6223000" cy="3581400"/>
+          </a:xfrm>
+        </p:spPr>
+        <p:txBody>
+          <a:bodyPr/>
+          <a:lstStyle/>
+          <a:p>
+            <a:r>
+              <a:rPr lang="en-US" dirty="0"/>
+              <a:t>Asteroid Spawner relies on Game Handler for Game State and accordingly spawn asteroids</a:t>
+            </a:r>
+          </a:p>
+          <a:p>
+            <a:r>
+              <a:rPr lang="en-US" dirty="0"/>
+              <a:t>Uses RPCs for spawning</a:t>
+            </a:r>
+          </a:p>
+          <a:p>
+            <a:r>
+              <a:rPr lang="en-US" dirty="0"/>
+              <a:t>Asteroids are like projectiles in terms of functioning</a:t>
             </a:r>
             <a:endParaRPr lang="en-CA" dirty="0"/>
           </a:p>
@@ -4550,10 +4589,10 @@
       </p:sp>
       <p:pic>
         <p:nvPicPr>
-          <p:cNvPr id="3" name="Picture 2">
+          <p:cNvPr id="4" name="Picture 3">
             <a:extLst>
               <a:ext uri="{FF2B5EF4-FFF2-40B4-BE49-F238E27FC236}">
-                <a16:creationId xmlns:a16="http://schemas.microsoft.com/office/drawing/2014/main" id="{95C0306D-56C9-455C-BDC4-9DBB84ECC8BD}"/>
+                <a16:creationId xmlns:a16="http://schemas.microsoft.com/office/drawing/2014/main" id="{FCBC8D94-BB3E-40B5-A8DD-DB6BEA8ADFCD}"/>
               </a:ext>
             </a:extLst>
           </p:cNvPr>
@@ -4570,8 +4609,38 @@
         </p:blipFill>
         <p:spPr>
           <a:xfrm>
-            <a:off x="3175000" y="1530171"/>
-            <a:ext cx="13465940" cy="5327829"/>
+            <a:off x="2871867" y="3702465"/>
+            <a:ext cx="2743583" cy="2800741"/>
+          </a:xfrm>
+          <a:prstGeom prst="rect">
+            <a:avLst/>
+          </a:prstGeom>
+        </p:spPr>
+      </p:pic>
+      <p:pic>
+        <p:nvPicPr>
+          <p:cNvPr id="6" name="Picture 5">
+            <a:extLst>
+              <a:ext uri="{FF2B5EF4-FFF2-40B4-BE49-F238E27FC236}">
+                <a16:creationId xmlns:a16="http://schemas.microsoft.com/office/drawing/2014/main" id="{1A70777C-B095-4BCC-8BDD-A5867616ED95}"/>
+              </a:ext>
+            </a:extLst>
+          </p:cNvPr>
+          <p:cNvPicPr>
+            <a:picLocks noChangeAspect="1"/>
+          </p:cNvPicPr>
+          <p:nvPr/>
+        </p:nvPicPr>
+        <p:blipFill>
+          <a:blip r:embed="rId3"/>
+          <a:stretch>
+            <a:fillRect/>
+          </a:stretch>
+        </p:blipFill>
+        <p:spPr>
+          <a:xfrm>
+            <a:off x="7586341" y="3530990"/>
+            <a:ext cx="1733792" cy="3143689"/>
           </a:xfrm>
           <a:prstGeom prst="rect">
             <a:avLst/>
@@ -4581,7 +4650,7 @@
     </p:spTree>
     <p:extLst>
       <p:ext uri="{BB962C8B-B14F-4D97-AF65-F5344CB8AC3E}">
-        <p14:creationId xmlns:p14="http://schemas.microsoft.com/office/powerpoint/2010/main" val="4187461867"/>
+        <p14:creationId xmlns:p14="http://schemas.microsoft.com/office/powerpoint/2010/main" val="3303553891"/>
       </p:ext>
     </p:extLst>
   </p:cSld>
@@ -4624,71 +4693,35 @@
             <p:ph type="title"/>
           </p:nvPr>
         </p:nvSpPr>
-        <p:spPr/>
-        <p:txBody>
-          <a:bodyPr/>
+        <p:spPr>
+          <a:xfrm>
+            <a:off x="939800" y="723900"/>
+            <a:ext cx="2540000" cy="965200"/>
+          </a:xfrm>
+        </p:spPr>
+        <p:txBody>
+          <a:bodyPr>
+            <a:normAutofit fontScale="90000"/>
+          </a:bodyPr>
           <a:lstStyle/>
           <a:p>
             <a:r>
               <a:rPr lang="en-US" dirty="0"/>
-              <a:t>Asteroids &amp; Spawning</a:t>
-            </a:r>
+              <a:t>Spawning</a:t>
+            </a:r>
+            <a:br>
+              <a:rPr lang="en-US" dirty="0"/>
+            </a:br>
             <a:endParaRPr lang="en-CA" dirty="0"/>
           </a:p>
         </p:txBody>
       </p:sp>
-      <p:sp>
-        <p:nvSpPr>
-          <p:cNvPr id="3" name="Content Placeholder 2">
+      <p:pic>
+        <p:nvPicPr>
+          <p:cNvPr id="8" name="Picture 7">
             <a:extLst>
               <a:ext uri="{FF2B5EF4-FFF2-40B4-BE49-F238E27FC236}">
-                <a16:creationId xmlns:a16="http://schemas.microsoft.com/office/drawing/2014/main" id="{889EBC58-8EAB-950E-18EC-DFC6B6F08CA4}"/>
-              </a:ext>
-            </a:extLst>
-          </p:cNvPr>
-          <p:cNvSpPr>
-            <a:spLocks noGrp="1"/>
-          </p:cNvSpPr>
-          <p:nvPr>
-            <p:ph idx="1"/>
-          </p:nvPr>
-        </p:nvSpPr>
-        <p:spPr>
-          <a:xfrm>
-            <a:off x="3465052" y="1911765"/>
-            <a:ext cx="6223000" cy="3581400"/>
-          </a:xfrm>
-        </p:spPr>
-        <p:txBody>
-          <a:bodyPr/>
-          <a:lstStyle/>
-          <a:p>
-            <a:r>
-              <a:rPr lang="en-US" dirty="0"/>
-              <a:t>Asteroid Spawner relies on Game Handler for Game State and accordingly spawn asteroids</a:t>
-            </a:r>
-          </a:p>
-          <a:p>
-            <a:r>
-              <a:rPr lang="en-US" dirty="0"/>
-              <a:t>Uses RPCs for spawning</a:t>
-            </a:r>
-          </a:p>
-          <a:p>
-            <a:r>
-              <a:rPr lang="en-US" dirty="0"/>
-              <a:t>Asteroids are like projectiles in terms of functioning</a:t>
-            </a:r>
-            <a:endParaRPr lang="en-CA" dirty="0"/>
-          </a:p>
-        </p:txBody>
-      </p:sp>
-      <p:pic>
-        <p:nvPicPr>
-          <p:cNvPr id="4" name="Picture 3">
-            <a:extLst>
-              <a:ext uri="{FF2B5EF4-FFF2-40B4-BE49-F238E27FC236}">
-                <a16:creationId xmlns:a16="http://schemas.microsoft.com/office/drawing/2014/main" id="{FCBC8D94-BB3E-40B5-A8DD-DB6BEA8ADFCD}"/>
+                <a16:creationId xmlns:a16="http://schemas.microsoft.com/office/drawing/2014/main" id="{0B280998-28A4-444F-A9C9-36B2BDFFF3FB}"/>
               </a:ext>
             </a:extLst>
           </p:cNvPr>
@@ -4705,38 +4738,8 @@
         </p:blipFill>
         <p:spPr>
           <a:xfrm>
-            <a:off x="2871867" y="3702465"/>
-            <a:ext cx="2743583" cy="2800741"/>
-          </a:xfrm>
-          <a:prstGeom prst="rect">
-            <a:avLst/>
-          </a:prstGeom>
-        </p:spPr>
-      </p:pic>
-      <p:pic>
-        <p:nvPicPr>
-          <p:cNvPr id="5" name="Picture 4">
-            <a:extLst>
-              <a:ext uri="{FF2B5EF4-FFF2-40B4-BE49-F238E27FC236}">
-                <a16:creationId xmlns:a16="http://schemas.microsoft.com/office/drawing/2014/main" id="{9C0BDA5D-C0C3-4124-A640-82B3C32198FE}"/>
-              </a:ext>
-            </a:extLst>
-          </p:cNvPr>
-          <p:cNvPicPr>
-            <a:picLocks noChangeAspect="1"/>
-          </p:cNvPicPr>
-          <p:nvPr/>
-        </p:nvPicPr>
-        <p:blipFill>
-          <a:blip r:embed="rId3"/>
-          <a:stretch>
-            <a:fillRect/>
-          </a:stretch>
-        </p:blipFill>
-        <p:spPr>
-          <a:xfrm>
-            <a:off x="7708902" y="3678845"/>
-            <a:ext cx="2013537" cy="3031430"/>
+            <a:off x="4108506" y="0"/>
+            <a:ext cx="9740787" cy="6858000"/>
           </a:xfrm>
           <a:prstGeom prst="rect">
             <a:avLst/>
@@ -4746,7 +4749,7 @@
     </p:spTree>
     <p:extLst>
       <p:ext uri="{BB962C8B-B14F-4D97-AF65-F5344CB8AC3E}">
-        <p14:creationId xmlns:p14="http://schemas.microsoft.com/office/powerpoint/2010/main" val="3303553891"/>
+        <p14:creationId xmlns:p14="http://schemas.microsoft.com/office/powerpoint/2010/main" val="3670831650"/>
       </p:ext>
     </p:extLst>
   </p:cSld>
@@ -4789,35 +4792,24 @@
             <p:ph type="title"/>
           </p:nvPr>
         </p:nvSpPr>
-        <p:spPr>
-          <a:xfrm>
-            <a:off x="939800" y="723900"/>
-            <a:ext cx="2540000" cy="965200"/>
-          </a:xfrm>
-        </p:spPr>
-        <p:txBody>
-          <a:bodyPr>
-            <a:normAutofit fontScale="90000"/>
-          </a:bodyPr>
+        <p:spPr/>
+        <p:txBody>
+          <a:bodyPr/>
           <a:lstStyle/>
           <a:p>
             <a:r>
-              <a:rPr lang="en-US" dirty="0"/>
-              <a:t>Spawning</a:t>
-            </a:r>
-            <a:br>
-              <a:rPr lang="en-US" dirty="0"/>
-            </a:br>
-            <a:endParaRPr lang="en-CA" dirty="0"/>
+              <a:rPr lang="en-CA" dirty="0"/>
+              <a:t>Asteroids</a:t>
+            </a:r>
           </a:p>
         </p:txBody>
       </p:sp>
       <p:pic>
         <p:nvPicPr>
-          <p:cNvPr id="8" name="Picture 7">
+          <p:cNvPr id="3" name="Picture 2">
             <a:extLst>
               <a:ext uri="{FF2B5EF4-FFF2-40B4-BE49-F238E27FC236}">
-                <a16:creationId xmlns:a16="http://schemas.microsoft.com/office/drawing/2014/main" id="{0B280998-28A4-444F-A9C9-36B2BDFFF3FB}"/>
+                <a16:creationId xmlns:a16="http://schemas.microsoft.com/office/drawing/2014/main" id="{F03C9663-F352-4972-BB09-9E99A2A65553}"/>
               </a:ext>
             </a:extLst>
           </p:cNvPr>
@@ -4834,96 +4826,8 @@
         </p:blipFill>
         <p:spPr>
           <a:xfrm>
-            <a:off x="4108506" y="0"/>
-            <a:ext cx="9740787" cy="6858000"/>
-          </a:xfrm>
-          <a:prstGeom prst="rect">
-            <a:avLst/>
-          </a:prstGeom>
-        </p:spPr>
-      </p:pic>
-    </p:spTree>
-    <p:extLst>
-      <p:ext uri="{BB962C8B-B14F-4D97-AF65-F5344CB8AC3E}">
-        <p14:creationId xmlns:p14="http://schemas.microsoft.com/office/powerpoint/2010/main" val="3670831650"/>
-      </p:ext>
-    </p:extLst>
-  </p:cSld>
-  <p:clrMapOvr>
-    <a:masterClrMapping/>
-  </p:clrMapOvr>
-</p:sld>
-</file>
-
-<file path=ppt/slides/slide18.xml><?xml version="1.0" encoding="utf-8"?>
-<p:sld xmlns:a="http://schemas.openxmlformats.org/drawingml/2006/main" xmlns:r="http://schemas.openxmlformats.org/officeDocument/2006/relationships" xmlns:p="http://schemas.openxmlformats.org/presentationml/2006/main">
-  <p:cSld>
-    <p:spTree>
-      <p:nvGrpSpPr>
-        <p:cNvPr id="1" name=""/>
-        <p:cNvGrpSpPr/>
-        <p:nvPr/>
-      </p:nvGrpSpPr>
-      <p:grpSpPr>
-        <a:xfrm>
-          <a:off x="0" y="0"/>
-          <a:ext cx="0" cy="0"/>
-          <a:chOff x="0" y="0"/>
-          <a:chExt cx="0" cy="0"/>
-        </a:xfrm>
-      </p:grpSpPr>
-      <p:sp>
-        <p:nvSpPr>
-          <p:cNvPr id="2" name="Title 1">
-            <a:extLst>
-              <a:ext uri="{FF2B5EF4-FFF2-40B4-BE49-F238E27FC236}">
-                <a16:creationId xmlns:a16="http://schemas.microsoft.com/office/drawing/2014/main" id="{4CD0E974-F2BB-1E2A-D46E-1613EFB342D4}"/>
-              </a:ext>
-            </a:extLst>
-          </p:cNvPr>
-          <p:cNvSpPr>
-            <a:spLocks noGrp="1"/>
-          </p:cNvSpPr>
-          <p:nvPr>
-            <p:ph type="title"/>
-          </p:nvPr>
-        </p:nvSpPr>
-        <p:spPr/>
-        <p:txBody>
-          <a:bodyPr/>
-          <a:lstStyle/>
-          <a:p>
-            <a:r>
-              <a:rPr lang="en-CA" dirty="0"/>
-              <a:t>Asteroids</a:t>
-            </a:r>
-          </a:p>
-        </p:txBody>
-      </p:sp>
-      <p:pic>
-        <p:nvPicPr>
-          <p:cNvPr id="8" name="Picture 7">
-            <a:extLst>
-              <a:ext uri="{FF2B5EF4-FFF2-40B4-BE49-F238E27FC236}">
-                <a16:creationId xmlns:a16="http://schemas.microsoft.com/office/drawing/2014/main" id="{6F822DA4-7418-40F8-9FEE-02433D444A5A}"/>
-              </a:ext>
-            </a:extLst>
-          </p:cNvPr>
-          <p:cNvPicPr>
-            <a:picLocks noChangeAspect="1"/>
-          </p:cNvPicPr>
-          <p:nvPr/>
-        </p:nvPicPr>
-        <p:blipFill>
-          <a:blip r:embed="rId2"/>
-          <a:stretch>
-            <a:fillRect/>
-          </a:stretch>
-        </p:blipFill>
-        <p:spPr>
-          <a:xfrm>
-            <a:off x="4018821" y="0"/>
-            <a:ext cx="8446958" cy="6858000"/>
+            <a:off x="3833133" y="0"/>
+            <a:ext cx="8777304" cy="6858000"/>
           </a:xfrm>
           <a:prstGeom prst="rect">
             <a:avLst/>
@@ -4934,94 +4838,6 @@
     <p:extLst>
       <p:ext uri="{BB962C8B-B14F-4D97-AF65-F5344CB8AC3E}">
         <p14:creationId xmlns:p14="http://schemas.microsoft.com/office/powerpoint/2010/main" val="3297522669"/>
-      </p:ext>
-    </p:extLst>
-  </p:cSld>
-  <p:clrMapOvr>
-    <a:masterClrMapping/>
-  </p:clrMapOvr>
-</p:sld>
-</file>
-
-<file path=ppt/slides/slide19.xml><?xml version="1.0" encoding="utf-8"?>
-<p:sld xmlns:a="http://schemas.openxmlformats.org/drawingml/2006/main" xmlns:r="http://schemas.openxmlformats.org/officeDocument/2006/relationships" xmlns:p="http://schemas.openxmlformats.org/presentationml/2006/main">
-  <p:cSld>
-    <p:spTree>
-      <p:nvGrpSpPr>
-        <p:cNvPr id="1" name=""/>
-        <p:cNvGrpSpPr/>
-        <p:nvPr/>
-      </p:nvGrpSpPr>
-      <p:grpSpPr>
-        <a:xfrm>
-          <a:off x="0" y="0"/>
-          <a:ext cx="0" cy="0"/>
-          <a:chOff x="0" y="0"/>
-          <a:chExt cx="0" cy="0"/>
-        </a:xfrm>
-      </p:grpSpPr>
-      <p:sp>
-        <p:nvSpPr>
-          <p:cNvPr id="2" name="Title 1">
-            <a:extLst>
-              <a:ext uri="{FF2B5EF4-FFF2-40B4-BE49-F238E27FC236}">
-                <a16:creationId xmlns:a16="http://schemas.microsoft.com/office/drawing/2014/main" id="{4CD0E974-F2BB-1E2A-D46E-1613EFB342D4}"/>
-              </a:ext>
-            </a:extLst>
-          </p:cNvPr>
-          <p:cNvSpPr>
-            <a:spLocks noGrp="1"/>
-          </p:cNvSpPr>
-          <p:nvPr>
-            <p:ph type="title"/>
-          </p:nvPr>
-        </p:nvSpPr>
-        <p:spPr/>
-        <p:txBody>
-          <a:bodyPr/>
-          <a:lstStyle/>
-          <a:p>
-            <a:r>
-              <a:rPr lang="en-CA" dirty="0"/>
-              <a:t>Asteroids</a:t>
-            </a:r>
-          </a:p>
-        </p:txBody>
-      </p:sp>
-      <p:pic>
-        <p:nvPicPr>
-          <p:cNvPr id="4" name="Picture 3">
-            <a:extLst>
-              <a:ext uri="{FF2B5EF4-FFF2-40B4-BE49-F238E27FC236}">
-                <a16:creationId xmlns:a16="http://schemas.microsoft.com/office/drawing/2014/main" id="{8D911624-0311-43F4-B3F6-9510BEE896DE}"/>
-              </a:ext>
-            </a:extLst>
-          </p:cNvPr>
-          <p:cNvPicPr>
-            <a:picLocks noChangeAspect="1"/>
-          </p:cNvPicPr>
-          <p:nvPr/>
-        </p:nvPicPr>
-        <p:blipFill>
-          <a:blip r:embed="rId2"/>
-          <a:stretch>
-            <a:fillRect/>
-          </a:stretch>
-        </p:blipFill>
-        <p:spPr>
-          <a:xfrm>
-            <a:off x="3763712" y="0"/>
-            <a:ext cx="10432329" cy="6858000"/>
-          </a:xfrm>
-          <a:prstGeom prst="rect">
-            <a:avLst/>
-          </a:prstGeom>
-        </p:spPr>
-      </p:pic>
-    </p:spTree>
-    <p:extLst>
-      <p:ext uri="{BB962C8B-B14F-4D97-AF65-F5344CB8AC3E}">
-        <p14:creationId xmlns:p14="http://schemas.microsoft.com/office/powerpoint/2010/main" val="1732074395"/>
       </p:ext>
     </p:extLst>
   </p:cSld>
@@ -6864,6 +6680,14 @@
 </file>
 
 <file path=customXml/item1.xml><?xml version="1.0" encoding="utf-8"?>
+<p:properties xmlns:p="http://schemas.microsoft.com/office/2006/metadata/properties" xmlns:xsi="http://www.w3.org/2001/XMLSchema-instance" xmlns:pc="http://schemas.microsoft.com/office/infopath/2007/PartnerControls">
+  <documentManagement>
+    <_activity xmlns="8ef3b232-4f83-4ac3-93e0-8af40791938c" xsi:nil="true"/>
+  </documentManagement>
+</p:properties>
+</file>
+
+<file path=customXml/item2.xml><?xml version="1.0" encoding="utf-8"?>
 <ct:contentTypeSchema xmlns:ct="http://schemas.microsoft.com/office/2006/metadata/contentType" xmlns:ma="http://schemas.microsoft.com/office/2006/metadata/properties/metaAttributes" ct:_="" ma:_="" ma:contentTypeName="Document" ma:contentTypeID="0x010100109A66ED96897440A5353CBC43C69C5C" ma:contentTypeVersion="15" ma:contentTypeDescription="Create a new document." ma:contentTypeScope="" ma:versionID="6f4ecf3be95950aaecfc4d2fbe88e78e">
   <xsd:schema xmlns:xsd="http://www.w3.org/2001/XMLSchema" xmlns:xs="http://www.w3.org/2001/XMLSchema" xmlns:p="http://schemas.microsoft.com/office/2006/metadata/properties" xmlns:ns3="8ef3b232-4f83-4ac3-93e0-8af40791938c" xmlns:ns4="0e7b9341-1a0f-4911-b676-5840cd2ede95" targetNamespace="http://schemas.microsoft.com/office/2006/metadata/properties" ma:root="true" ma:fieldsID="bb87a4993aa515e66054f8590c423ff8" ns3:_="" ns4:_="">
     <xsd:import namespace="8ef3b232-4f83-4ac3-93e0-8af40791938c"/>
@@ -7096,14 +6920,6 @@
 </ct:contentTypeSchema>
 </file>
 
-<file path=customXml/item2.xml><?xml version="1.0" encoding="utf-8"?>
-<p:properties xmlns:p="http://schemas.microsoft.com/office/2006/metadata/properties" xmlns:xsi="http://www.w3.org/2001/XMLSchema-instance" xmlns:pc="http://schemas.microsoft.com/office/infopath/2007/PartnerControls">
-  <documentManagement>
-    <_activity xmlns="8ef3b232-4f83-4ac3-93e0-8af40791938c" xsi:nil="true"/>
-  </documentManagement>
-</p:properties>
-</file>
-
 <file path=customXml/item3.xml><?xml version="1.0" encoding="utf-8"?>
 <?mso-contentType ?>
 <FormTemplates xmlns="http://schemas.microsoft.com/sharepoint/v3/contenttype/forms">
@@ -7114,6 +6930,23 @@
 </file>
 
 <file path=customXml/itemProps1.xml><?xml version="1.0" encoding="utf-8"?>
+<ds:datastoreItem xmlns:ds="http://schemas.openxmlformats.org/officeDocument/2006/customXml" ds:itemID="{D6B684E3-7F57-449C-A891-60D19D6617B4}">
+  <ds:schemaRefs>
+    <ds:schemaRef ds:uri="http://purl.org/dc/dcmitype/"/>
+    <ds:schemaRef ds:uri="http://schemas.openxmlformats.org/package/2006/metadata/core-properties"/>
+    <ds:schemaRef ds:uri="http://schemas.microsoft.com/office/2006/documentManagement/types"/>
+    <ds:schemaRef ds:uri="http://purl.org/dc/elements/1.1/"/>
+    <ds:schemaRef ds:uri="http://www.w3.org/XML/1998/namespace"/>
+    <ds:schemaRef ds:uri="http://schemas.microsoft.com/office/infopath/2007/PartnerControls"/>
+    <ds:schemaRef ds:uri="0e7b9341-1a0f-4911-b676-5840cd2ede95"/>
+    <ds:schemaRef ds:uri="8ef3b232-4f83-4ac3-93e0-8af40791938c"/>
+    <ds:schemaRef ds:uri="http://schemas.microsoft.com/office/2006/metadata/properties"/>
+    <ds:schemaRef ds:uri="http://purl.org/dc/terms/"/>
+  </ds:schemaRefs>
+</ds:datastoreItem>
+</file>
+
+<file path=customXml/itemProps2.xml><?xml version="1.0" encoding="utf-8"?>
 <ds:datastoreItem xmlns:ds="http://schemas.openxmlformats.org/officeDocument/2006/customXml" ds:itemID="{0F903631-368A-44BD-BCC8-FC92D0431721}">
   <ds:schemaRefs>
     <ds:schemaRef ds:uri="http://schemas.microsoft.com/office/2006/metadata/contentType"/>
@@ -7132,23 +6965,6 @@
 </ds:datastoreItem>
 </file>
 
-<file path=customXml/itemProps2.xml><?xml version="1.0" encoding="utf-8"?>
-<ds:datastoreItem xmlns:ds="http://schemas.openxmlformats.org/officeDocument/2006/customXml" ds:itemID="{D6B684E3-7F57-449C-A891-60D19D6617B4}">
-  <ds:schemaRefs>
-    <ds:schemaRef ds:uri="http://purl.org/dc/dcmitype/"/>
-    <ds:schemaRef ds:uri="http://schemas.openxmlformats.org/package/2006/metadata/core-properties"/>
-    <ds:schemaRef ds:uri="http://schemas.microsoft.com/office/2006/documentManagement/types"/>
-    <ds:schemaRef ds:uri="http://purl.org/dc/elements/1.1/"/>
-    <ds:schemaRef ds:uri="http://www.w3.org/XML/1998/namespace"/>
-    <ds:schemaRef ds:uri="http://schemas.microsoft.com/office/infopath/2007/PartnerControls"/>
-    <ds:schemaRef ds:uri="0e7b9341-1a0f-4911-b676-5840cd2ede95"/>
-    <ds:schemaRef ds:uri="8ef3b232-4f83-4ac3-93e0-8af40791938c"/>
-    <ds:schemaRef ds:uri="http://schemas.microsoft.com/office/2006/metadata/properties"/>
-    <ds:schemaRef ds:uri="http://purl.org/dc/terms/"/>
-  </ds:schemaRefs>
-</ds:datastoreItem>
-</file>
-
 <file path=customXml/itemProps3.xml><?xml version="1.0" encoding="utf-8"?>
 <ds:datastoreItem xmlns:ds="http://schemas.openxmlformats.org/officeDocument/2006/customXml" ds:itemID="{FF8C05F3-6C1F-4D9F-9761-3194EC164427}">
   <ds:schemaRefs>
